--- a/output_pptx/Holy_Holy_Holy_Lord_God_Almighty.pptx
+++ b/output_pptx/Holy_Holy_Holy_Lord_God_Almighty.pptx
@@ -20,6 +20,17 @@
     <p:sldId id="268" r:id="rId19"/>
     <p:sldId id="269" r:id="rId20"/>
     <p:sldId id="270" r:id="rId21"/>
+    <p:sldId id="271" r:id="rId22"/>
+    <p:sldId id="272" r:id="rId23"/>
+    <p:sldId id="273" r:id="rId24"/>
+    <p:sldId id="274" r:id="rId25"/>
+    <p:sldId id="275" r:id="rId26"/>
+    <p:sldId id="276" r:id="rId27"/>
+    <p:sldId id="277" r:id="rId28"/>
+    <p:sldId id="278" r:id="rId29"/>
+    <p:sldId id="279" r:id="rId30"/>
+    <p:sldId id="280" r:id="rId31"/>
+    <p:sldId id="281" r:id="rId32"/>
   </p:sldIdLst>
   <p:sldSz cx="12191695" cy="6858000" type="screen4x3"/>
   <p:notesSz cx="6858000" cy="9144000"/>
@@ -3118,8 +3129,8 @@
         </p:nvSpPr>
         <p:spPr>
           <a:xfrm>
-            <a:off x="594360" y="2258568"/>
-            <a:ext cx="11002975" cy="685800"/>
+            <a:off x="640080" y="2500884"/>
+            <a:ext cx="10911535" cy="731520"/>
           </a:xfrm>
           <a:prstGeom prst="rect">
             <a:avLst/>
@@ -3134,13 +3145,13 @@
           <a:p>
             <a:pPr algn="ctr"/>
             <a:r>
-              <a:rPr sz="4400" b="1" i="0">
+              <a:rPr sz="4800" b="1" i="0">
                 <a:solidFill>
                   <a:srgbClr val="FFFFFF"/>
                 </a:solidFill>
                 <a:latin typeface="Arial"/>
               </a:rPr>
-              <a:t>Senhor Deus Todo-Poderoso!</a:t>
+              <a:t>聖なる　聖なる　聖なるかな</a:t>
             </a:r>
           </a:p>
         </p:txBody>
@@ -3153,8 +3164,8 @@
         </p:nvSpPr>
         <p:spPr>
           <a:xfrm>
-            <a:off x="594360" y="2980944"/>
-            <a:ext cx="11002975" cy="347472"/>
+            <a:off x="640080" y="3268980"/>
+            <a:ext cx="10911535" cy="365760"/>
           </a:xfrm>
           <a:prstGeom prst="rect">
             <a:avLst/>
@@ -3169,13 +3180,13 @@
           <a:p>
             <a:pPr algn="ctr"/>
             <a:r>
-              <a:rPr sz="2200" b="0" i="1">
-                <a:solidFill>
-                  <a:srgbClr val="8C8C8C"/>
+              <a:rPr sz="2400" b="0" i="1">
+                <a:solidFill>
+                  <a:srgbClr val="AAAAAA"/>
                 </a:solidFill>
                 <a:latin typeface="Arial"/>
               </a:rPr>
-              <a:t/>
+              <a:t>hijiri naru hijiri naru hijiri narukana</a:t>
             </a:r>
           </a:p>
         </p:txBody>
@@ -3188,8 +3199,8 @@
         </p:nvSpPr>
         <p:spPr>
           <a:xfrm>
-            <a:off x="594360" y="3529584"/>
-            <a:ext cx="11002975" cy="685800"/>
+            <a:off x="640080" y="4046220"/>
+            <a:ext cx="10911535" cy="310896"/>
           </a:xfrm>
           <a:prstGeom prst="rect">
             <a:avLst/>
@@ -3204,48 +3215,13 @@
           <a:p>
             <a:pPr algn="ctr"/>
             <a:r>
-              <a:rPr sz="4400" b="1" i="0">
-                <a:solidFill>
-                  <a:srgbClr val="FFFFFF"/>
+              <a:rPr sz="2000" b="0" i="1">
+                <a:solidFill>
+                  <a:srgbClr val="828282"/>
                 </a:solidFill>
                 <a:latin typeface="Arial"/>
               </a:rPr>
-              <a:t>Cedo pela manhã</a:t>
-            </a:r>
-          </a:p>
-        </p:txBody>
-      </p:sp>
-      <p:sp>
-        <p:nvSpPr>
-          <p:cNvPr id="5" name="TextBox 4"/>
-          <p:cNvSpPr txBox="1"/>
-          <p:nvPr/>
-        </p:nvSpPr>
-        <p:spPr>
-          <a:xfrm>
-            <a:off x="594360" y="4251960"/>
-            <a:ext cx="11002975" cy="347472"/>
-          </a:xfrm>
-          <a:prstGeom prst="rect">
-            <a:avLst/>
-          </a:prstGeom>
-          <a:noFill/>
-        </p:spPr>
-        <p:txBody>
-          <a:bodyPr wrap="square">
-            <a:spAutoFit/>
-          </a:bodyPr>
-          <a:lstStyle/>
-          <a:p>
-            <a:pPr algn="ctr"/>
-            <a:r>
-              <a:rPr sz="2200" b="0" i="1">
-                <a:solidFill>
-                  <a:srgbClr val="8C8C8C"/>
-                </a:solidFill>
-                <a:latin typeface="Arial"/>
-              </a:rPr>
-              <a:t/>
+              <a:t>Senhor Deus Todo-Poderoso!</a:t>
             </a:r>
           </a:p>
         </p:txBody>
@@ -3284,8 +3260,8 @@
         </p:nvSpPr>
         <p:spPr>
           <a:xfrm>
-            <a:off x="594360" y="2258568"/>
-            <a:ext cx="11002975" cy="685800"/>
+            <a:off x="640080" y="2052828"/>
+            <a:ext cx="10911535" cy="731520"/>
           </a:xfrm>
           <a:prstGeom prst="rect">
             <a:avLst/>
@@ -3300,13 +3276,13 @@
           <a:p>
             <a:pPr algn="ctr"/>
             <a:r>
-              <a:rPr sz="4400" b="1" i="0">
+              <a:rPr sz="4800" b="1" i="0">
                 <a:solidFill>
                   <a:srgbClr val="FFFFFF"/>
                 </a:solidFill>
                 <a:latin typeface="Arial"/>
               </a:rPr>
-              <a:t/>
+              <a:t>Santo, Santo, Santo!</a:t>
             </a:r>
           </a:p>
         </p:txBody>
@@ -3319,8 +3295,8 @@
         </p:nvSpPr>
         <p:spPr>
           <a:xfrm>
-            <a:off x="594360" y="2980944"/>
-            <a:ext cx="11002975" cy="347472"/>
+            <a:off x="640080" y="2985516"/>
+            <a:ext cx="10911535" cy="731520"/>
           </a:xfrm>
           <a:prstGeom prst="rect">
             <a:avLst/>
@@ -3335,83 +3311,13 @@
           <a:p>
             <a:pPr algn="ctr"/>
             <a:r>
-              <a:rPr sz="2200" b="0" i="1">
-                <a:solidFill>
-                  <a:srgbClr val="8C8C8C"/>
+              <a:rPr sz="4800" b="1" i="0">
+                <a:solidFill>
+                  <a:srgbClr val="FFFFFF"/>
                 </a:solidFill>
                 <a:latin typeface="Arial"/>
               </a:rPr>
-              <a:t/>
-            </a:r>
-          </a:p>
-        </p:txBody>
-      </p:sp>
-      <p:sp>
-        <p:nvSpPr>
-          <p:cNvPr id="4" name="TextBox 3"/>
-          <p:cNvSpPr txBox="1"/>
-          <p:nvPr/>
-        </p:nvSpPr>
-        <p:spPr>
-          <a:xfrm>
-            <a:off x="594360" y="3529584"/>
-            <a:ext cx="11002975" cy="685800"/>
-          </a:xfrm>
-          <a:prstGeom prst="rect">
-            <a:avLst/>
-          </a:prstGeom>
-          <a:noFill/>
-        </p:spPr>
-        <p:txBody>
-          <a:bodyPr wrap="square">
-            <a:spAutoFit/>
-          </a:bodyPr>
-          <a:lstStyle/>
-          <a:p>
-            <a:pPr algn="ctr"/>
-            <a:r>
-              <a:rPr sz="4400" b="1" i="0">
-                <a:solidFill>
-                  <a:srgbClr val="FFFFFF"/>
-                </a:solidFill>
-                <a:latin typeface="Arial"/>
-              </a:rPr>
-              <a:t/>
-            </a:r>
-          </a:p>
-        </p:txBody>
-      </p:sp>
-      <p:sp>
-        <p:nvSpPr>
-          <p:cNvPr id="5" name="TextBox 4"/>
-          <p:cNvSpPr txBox="1"/>
-          <p:nvPr/>
-        </p:nvSpPr>
-        <p:spPr>
-          <a:xfrm>
-            <a:off x="594360" y="4251960"/>
-            <a:ext cx="11002975" cy="347472"/>
-          </a:xfrm>
-          <a:prstGeom prst="rect">
-            <a:avLst/>
-          </a:prstGeom>
-          <a:noFill/>
-        </p:spPr>
-        <p:txBody>
-          <a:bodyPr wrap="square">
-            <a:spAutoFit/>
-          </a:bodyPr>
-          <a:lstStyle/>
-          <a:p>
-            <a:pPr algn="ctr"/>
-            <a:r>
-              <a:rPr sz="2200" b="0" i="1">
-                <a:solidFill>
-                  <a:srgbClr val="8C8C8C"/>
-                </a:solidFill>
-                <a:latin typeface="Arial"/>
-              </a:rPr>
-              <a:t/>
+              <a:t>Santo, Santo, Santo!</a:t>
             </a:r>
           </a:p>
         </p:txBody>
@@ -3450,8 +3356,8 @@
         </p:nvSpPr>
         <p:spPr>
           <a:xfrm>
-            <a:off x="594360" y="2258568"/>
-            <a:ext cx="11002975" cy="685800"/>
+            <a:off x="640080" y="2052828"/>
+            <a:ext cx="10911535" cy="731520"/>
           </a:xfrm>
           <a:prstGeom prst="rect">
             <a:avLst/>
@@ -3466,13 +3372,13 @@
           <a:p>
             <a:pPr algn="ctr"/>
             <a:r>
-              <a:rPr sz="4400" b="1" i="0">
+              <a:rPr sz="4800" b="1" i="0">
                 <a:solidFill>
                   <a:srgbClr val="FFFFFF"/>
                 </a:solidFill>
                 <a:latin typeface="Arial"/>
               </a:rPr>
-              <a:t/>
+              <a:t>Senhor Deus Todo-Poderoso!</a:t>
             </a:r>
           </a:p>
         </p:txBody>
@@ -3485,8 +3391,8 @@
         </p:nvSpPr>
         <p:spPr>
           <a:xfrm>
-            <a:off x="594360" y="2980944"/>
-            <a:ext cx="11002975" cy="347472"/>
+            <a:off x="640080" y="2985516"/>
+            <a:ext cx="10911535" cy="731520"/>
           </a:xfrm>
           <a:prstGeom prst="rect">
             <a:avLst/>
@@ -3501,83 +3407,13 @@
           <a:p>
             <a:pPr algn="ctr"/>
             <a:r>
-              <a:rPr sz="2200" b="0" i="1">
-                <a:solidFill>
-                  <a:srgbClr val="8C8C8C"/>
+              <a:rPr sz="4800" b="1" i="0">
+                <a:solidFill>
+                  <a:srgbClr val="FFFFFF"/>
                 </a:solidFill>
                 <a:latin typeface="Arial"/>
               </a:rPr>
-              <a:t/>
-            </a:r>
-          </a:p>
-        </p:txBody>
-      </p:sp>
-      <p:sp>
-        <p:nvSpPr>
-          <p:cNvPr id="4" name="TextBox 3"/>
-          <p:cNvSpPr txBox="1"/>
-          <p:nvPr/>
-        </p:nvSpPr>
-        <p:spPr>
-          <a:xfrm>
-            <a:off x="594360" y="3529584"/>
-            <a:ext cx="11002975" cy="685800"/>
-          </a:xfrm>
-          <a:prstGeom prst="rect">
-            <a:avLst/>
-          </a:prstGeom>
-          <a:noFill/>
-        </p:spPr>
-        <p:txBody>
-          <a:bodyPr wrap="square">
-            <a:spAutoFit/>
-          </a:bodyPr>
-          <a:lstStyle/>
-          <a:p>
-            <a:pPr algn="ctr"/>
-            <a:r>
-              <a:rPr sz="4400" b="1" i="0">
-                <a:solidFill>
-                  <a:srgbClr val="FFFFFF"/>
-                </a:solidFill>
-                <a:latin typeface="Arial"/>
-              </a:rPr>
-              <a:t/>
-            </a:r>
-          </a:p>
-        </p:txBody>
-      </p:sp>
-      <p:sp>
-        <p:nvSpPr>
-          <p:cNvPr id="5" name="TextBox 4"/>
-          <p:cNvSpPr txBox="1"/>
-          <p:nvPr/>
-        </p:nvSpPr>
-        <p:spPr>
-          <a:xfrm>
-            <a:off x="594360" y="4251960"/>
-            <a:ext cx="11002975" cy="347472"/>
-          </a:xfrm>
-          <a:prstGeom prst="rect">
-            <a:avLst/>
-          </a:prstGeom>
-          <a:noFill/>
-        </p:spPr>
-        <p:txBody>
-          <a:bodyPr wrap="square">
-            <a:spAutoFit/>
-          </a:bodyPr>
-          <a:lstStyle/>
-          <a:p>
-            <a:pPr algn="ctr"/>
-            <a:r>
-              <a:rPr sz="2200" b="0" i="1">
-                <a:solidFill>
-                  <a:srgbClr val="8C8C8C"/>
-                </a:solidFill>
-                <a:latin typeface="Arial"/>
-              </a:rPr>
-              <a:t/>
+              <a:t>Cedo pela manhã</a:t>
             </a:r>
           </a:p>
         </p:txBody>
@@ -3616,8 +3452,8 @@
         </p:nvSpPr>
         <p:spPr>
           <a:xfrm>
-            <a:off x="594360" y="2258568"/>
-            <a:ext cx="11002975" cy="685800"/>
+            <a:off x="640080" y="2052828"/>
+            <a:ext cx="10911535" cy="731520"/>
           </a:xfrm>
           <a:prstGeom prst="rect">
             <a:avLst/>
@@ -3632,13 +3468,13 @@
           <a:p>
             <a:pPr algn="ctr"/>
             <a:r>
-              <a:rPr sz="4400" b="1" i="0">
+              <a:rPr sz="4800" b="1" i="0">
                 <a:solidFill>
                   <a:srgbClr val="FFFFFF"/>
                 </a:solidFill>
                 <a:latin typeface="Arial"/>
               </a:rPr>
-              <a:t/>
+              <a:t>Nossa canção soa para Ti;</a:t>
             </a:r>
           </a:p>
         </p:txBody>
@@ -3651,8 +3487,8 @@
         </p:nvSpPr>
         <p:spPr>
           <a:xfrm>
-            <a:off x="594360" y="2980944"/>
-            <a:ext cx="11002975" cy="347472"/>
+            <a:off x="640080" y="2985516"/>
+            <a:ext cx="10911535" cy="731520"/>
           </a:xfrm>
           <a:prstGeom prst="rect">
             <a:avLst/>
@@ -3667,83 +3503,13 @@
           <a:p>
             <a:pPr algn="ctr"/>
             <a:r>
-              <a:rPr sz="2200" b="0" i="1">
-                <a:solidFill>
-                  <a:srgbClr val="8C8C8C"/>
+              <a:rPr sz="4800" b="1" i="0">
+                <a:solidFill>
+                  <a:srgbClr val="FFFFFF"/>
                 </a:solidFill>
                 <a:latin typeface="Arial"/>
               </a:rPr>
-              <a:t/>
-            </a:r>
-          </a:p>
-        </p:txBody>
-      </p:sp>
-      <p:sp>
-        <p:nvSpPr>
-          <p:cNvPr id="4" name="TextBox 3"/>
-          <p:cNvSpPr txBox="1"/>
-          <p:nvPr/>
-        </p:nvSpPr>
-        <p:spPr>
-          <a:xfrm>
-            <a:off x="594360" y="3529584"/>
-            <a:ext cx="11002975" cy="685800"/>
-          </a:xfrm>
-          <a:prstGeom prst="rect">
-            <a:avLst/>
-          </a:prstGeom>
-          <a:noFill/>
-        </p:spPr>
-        <p:txBody>
-          <a:bodyPr wrap="square">
-            <a:spAutoFit/>
-          </a:bodyPr>
-          <a:lstStyle/>
-          <a:p>
-            <a:pPr algn="ctr"/>
-            <a:r>
-              <a:rPr sz="4400" b="1" i="0">
-                <a:solidFill>
-                  <a:srgbClr val="FFFFFF"/>
-                </a:solidFill>
-                <a:latin typeface="Arial"/>
-              </a:rPr>
-              <a:t/>
-            </a:r>
-          </a:p>
-        </p:txBody>
-      </p:sp>
-      <p:sp>
-        <p:nvSpPr>
-          <p:cNvPr id="5" name="TextBox 4"/>
-          <p:cNvSpPr txBox="1"/>
-          <p:nvPr/>
-        </p:nvSpPr>
-        <p:spPr>
-          <a:xfrm>
-            <a:off x="594360" y="4251960"/>
-            <a:ext cx="11002975" cy="347472"/>
-          </a:xfrm>
-          <a:prstGeom prst="rect">
-            <a:avLst/>
-          </a:prstGeom>
-          <a:noFill/>
-        </p:spPr>
-        <p:txBody>
-          <a:bodyPr wrap="square">
-            <a:spAutoFit/>
-          </a:bodyPr>
-          <a:lstStyle/>
-          <a:p>
-            <a:pPr algn="ctr"/>
-            <a:r>
-              <a:rPr sz="2200" b="0" i="1">
-                <a:solidFill>
-                  <a:srgbClr val="8C8C8C"/>
-                </a:solidFill>
-                <a:latin typeface="Arial"/>
-              </a:rPr>
-              <a:t/>
+              <a:t>Santo, Santo, Santo!</a:t>
             </a:r>
           </a:p>
         </p:txBody>
@@ -3782,8 +3548,8 @@
         </p:nvSpPr>
         <p:spPr>
           <a:xfrm>
-            <a:off x="594360" y="2258568"/>
-            <a:ext cx="11002975" cy="685800"/>
+            <a:off x="640080" y="2702052"/>
+            <a:ext cx="10911535" cy="731520"/>
           </a:xfrm>
           <a:prstGeom prst="rect">
             <a:avLst/>
@@ -3798,118 +3564,13 @@
           <a:p>
             <a:pPr algn="ctr"/>
             <a:r>
-              <a:rPr sz="4400" b="1" i="0">
+              <a:rPr sz="4800" b="1" i="0">
                 <a:solidFill>
                   <a:srgbClr val="FFFFFF"/>
                 </a:solidFill>
                 <a:latin typeface="Arial"/>
               </a:rPr>
-              <a:t/>
-            </a:r>
-          </a:p>
-        </p:txBody>
-      </p:sp>
-      <p:sp>
-        <p:nvSpPr>
-          <p:cNvPr id="3" name="TextBox 2"/>
-          <p:cNvSpPr txBox="1"/>
-          <p:nvPr/>
-        </p:nvSpPr>
-        <p:spPr>
-          <a:xfrm>
-            <a:off x="594360" y="2980944"/>
-            <a:ext cx="11002975" cy="347472"/>
-          </a:xfrm>
-          <a:prstGeom prst="rect">
-            <a:avLst/>
-          </a:prstGeom>
-          <a:noFill/>
-        </p:spPr>
-        <p:txBody>
-          <a:bodyPr wrap="square">
-            <a:spAutoFit/>
-          </a:bodyPr>
-          <a:lstStyle/>
-          <a:p>
-            <a:pPr algn="ctr"/>
-            <a:r>
-              <a:rPr sz="2200" b="0" i="1">
-                <a:solidFill>
-                  <a:srgbClr val="8C8C8C"/>
-                </a:solidFill>
-                <a:latin typeface="Arial"/>
-              </a:rPr>
-              <a:t/>
-            </a:r>
-          </a:p>
-        </p:txBody>
-      </p:sp>
-      <p:sp>
-        <p:nvSpPr>
-          <p:cNvPr id="4" name="TextBox 3"/>
-          <p:cNvSpPr txBox="1"/>
-          <p:nvPr/>
-        </p:nvSpPr>
-        <p:spPr>
-          <a:xfrm>
-            <a:off x="594360" y="3529584"/>
-            <a:ext cx="11002975" cy="685800"/>
-          </a:xfrm>
-          <a:prstGeom prst="rect">
-            <a:avLst/>
-          </a:prstGeom>
-          <a:noFill/>
-        </p:spPr>
-        <p:txBody>
-          <a:bodyPr wrap="square">
-            <a:spAutoFit/>
-          </a:bodyPr>
-          <a:lstStyle/>
-          <a:p>
-            <a:pPr algn="ctr"/>
-            <a:r>
-              <a:rPr sz="4400" b="1" i="0">
-                <a:solidFill>
-                  <a:srgbClr val="FFFFFF"/>
-                </a:solidFill>
-                <a:latin typeface="Arial"/>
-              </a:rPr>
-              <a:t/>
-            </a:r>
-          </a:p>
-        </p:txBody>
-      </p:sp>
-      <p:sp>
-        <p:nvSpPr>
-          <p:cNvPr id="5" name="TextBox 4"/>
-          <p:cNvSpPr txBox="1"/>
-          <p:nvPr/>
-        </p:nvSpPr>
-        <p:spPr>
-          <a:xfrm>
-            <a:off x="594360" y="4251960"/>
-            <a:ext cx="11002975" cy="347472"/>
-          </a:xfrm>
-          <a:prstGeom prst="rect">
-            <a:avLst/>
-          </a:prstGeom>
-          <a:noFill/>
-        </p:spPr>
-        <p:txBody>
-          <a:bodyPr wrap="square">
-            <a:spAutoFit/>
-          </a:bodyPr>
-          <a:lstStyle/>
-          <a:p>
-            <a:pPr algn="ctr"/>
-            <a:r>
-              <a:rPr sz="2200" b="0" i="1">
-                <a:solidFill>
-                  <a:srgbClr val="8C8C8C"/>
-                </a:solidFill>
-                <a:latin typeface="Arial"/>
-              </a:rPr>
-              <a:t/>
+              <a:t>Misericordioso e Poderoso!</a:t>
             </a:r>
           </a:p>
         </p:txBody>
@@ -3948,8 +3609,8 @@
         </p:nvSpPr>
         <p:spPr>
           <a:xfrm>
-            <a:off x="594360" y="2258568"/>
-            <a:ext cx="11002975" cy="685800"/>
+            <a:off x="640080" y="2500884"/>
+            <a:ext cx="10911535" cy="731520"/>
           </a:xfrm>
           <a:prstGeom prst="rect">
             <a:avLst/>
@@ -3964,13 +3625,13 @@
           <a:p>
             <a:pPr algn="ctr"/>
             <a:r>
-              <a:rPr sz="4400" b="1" i="0">
+              <a:rPr sz="4800" b="1" i="0">
                 <a:solidFill>
                   <a:srgbClr val="FFFFFF"/>
                 </a:solidFill>
                 <a:latin typeface="Arial"/>
               </a:rPr>
-              <a:t/>
+              <a:t>聖なる　聖なる　聖なるかな</a:t>
             </a:r>
           </a:p>
         </p:txBody>
@@ -3983,8 +3644,8 @@
         </p:nvSpPr>
         <p:spPr>
           <a:xfrm>
-            <a:off x="594360" y="2980944"/>
-            <a:ext cx="11002975" cy="347472"/>
+            <a:off x="640080" y="3268980"/>
+            <a:ext cx="10911535" cy="365760"/>
           </a:xfrm>
           <a:prstGeom prst="rect">
             <a:avLst/>
@@ -3999,13 +3660,13 @@
           <a:p>
             <a:pPr algn="ctr"/>
             <a:r>
-              <a:rPr sz="2200" b="0" i="1">
-                <a:solidFill>
-                  <a:srgbClr val="8C8C8C"/>
+              <a:rPr sz="2400" b="0" i="1">
+                <a:solidFill>
+                  <a:srgbClr val="AAAAAA"/>
                 </a:solidFill>
                 <a:latin typeface="Arial"/>
               </a:rPr>
-              <a:t/>
+              <a:t>hijiri naru hijiri naru hijiri narukana</a:t>
             </a:r>
           </a:p>
         </p:txBody>
@@ -4018,8 +3679,8 @@
         </p:nvSpPr>
         <p:spPr>
           <a:xfrm>
-            <a:off x="594360" y="3529584"/>
-            <a:ext cx="11002975" cy="685800"/>
+            <a:off x="640080" y="4046220"/>
+            <a:ext cx="10911535" cy="310896"/>
           </a:xfrm>
           <a:prstGeom prst="rect">
             <a:avLst/>
@@ -4034,48 +3695,13 @@
           <a:p>
             <a:pPr algn="ctr"/>
             <a:r>
-              <a:rPr sz="4400" b="1" i="0">
-                <a:solidFill>
-                  <a:srgbClr val="FFFFFF"/>
+              <a:rPr sz="2000" b="0" i="1">
+                <a:solidFill>
+                  <a:srgbClr val="828282"/>
                 </a:solidFill>
                 <a:latin typeface="Arial"/>
               </a:rPr>
-              <a:t/>
-            </a:r>
-          </a:p>
-        </p:txBody>
-      </p:sp>
-      <p:sp>
-        <p:nvSpPr>
-          <p:cNvPr id="5" name="TextBox 4"/>
-          <p:cNvSpPr txBox="1"/>
-          <p:nvPr/>
-        </p:nvSpPr>
-        <p:spPr>
-          <a:xfrm>
-            <a:off x="594360" y="4251960"/>
-            <a:ext cx="11002975" cy="347472"/>
-          </a:xfrm>
-          <a:prstGeom prst="rect">
-            <a:avLst/>
-          </a:prstGeom>
-          <a:noFill/>
-        </p:spPr>
-        <p:txBody>
-          <a:bodyPr wrap="square">
-            <a:spAutoFit/>
-          </a:bodyPr>
-          <a:lstStyle/>
-          <a:p>
-            <a:pPr algn="ctr"/>
-            <a:r>
-              <a:rPr sz="2200" b="0" i="1">
-                <a:solidFill>
-                  <a:srgbClr val="8C8C8C"/>
-                </a:solidFill>
-                <a:latin typeface="Arial"/>
-              </a:rPr>
-              <a:t/>
+              <a:t>Senhor Deus Todo-Poderoso!</a:t>
             </a:r>
           </a:p>
         </p:txBody>
@@ -4114,8 +3740,8 @@
         </p:nvSpPr>
         <p:spPr>
           <a:xfrm>
-            <a:off x="594360" y="2258568"/>
-            <a:ext cx="11002975" cy="685800"/>
+            <a:off x="640080" y="2702052"/>
+            <a:ext cx="10911535" cy="731520"/>
           </a:xfrm>
           <a:prstGeom prst="rect">
             <a:avLst/>
@@ -4130,27 +3756,53 @@
           <a:p>
             <a:pPr algn="ctr"/>
             <a:r>
-              <a:rPr sz="4400" b="1" i="0">
+              <a:rPr sz="4800" b="1" i="0">
                 <a:solidFill>
                   <a:srgbClr val="FFFFFF"/>
                 </a:solidFill>
                 <a:latin typeface="Arial"/>
               </a:rPr>
-              <a:t/>
-            </a:r>
-          </a:p>
-        </p:txBody>
-      </p:sp>
-      <p:sp>
-        <p:nvSpPr>
-          <p:cNvPr id="3" name="TextBox 2"/>
+              <a:t>Deus em três pessoas,</a:t>
+            </a:r>
+          </a:p>
+        </p:txBody>
+      </p:sp>
+    </p:spTree>
+  </p:cSld>
+  <p:clrMapOvr>
+    <a:masterClrMapping/>
+  </p:clrMapOvr>
+</p:sld>
+</file>
+
+<file path=ppt/slides/slide16.xml><?xml version="1.0" encoding="utf-8"?>
+<p:sld xmlns:a="http://schemas.openxmlformats.org/drawingml/2006/main" xmlns:p="http://schemas.openxmlformats.org/presentationml/2006/main" xmlns:r="http://schemas.openxmlformats.org/officeDocument/2006/relationships">
+  <p:cSld>
+    <p:bg>
+      <p:bgPr>
+        <a:solidFill>
+          <a:srgbClr val="000000"/>
+        </a:solidFill>
+        <a:effectLst/>
+      </p:bgPr>
+    </p:bg>
+    <p:spTree>
+      <p:nvGrpSpPr>
+        <p:cNvPr id="1" name=""/>
+        <p:cNvGrpSpPr/>
+        <p:nvPr/>
+      </p:nvGrpSpPr>
+      <p:grpSpPr/>
+      <p:sp>
+        <p:nvSpPr>
+          <p:cNvPr id="2" name="TextBox 1"/>
           <p:cNvSpPr txBox="1"/>
           <p:nvPr/>
         </p:nvSpPr>
         <p:spPr>
           <a:xfrm>
-            <a:off x="594360" y="2980944"/>
-            <a:ext cx="11002975" cy="347472"/>
+            <a:off x="640080" y="2500884"/>
+            <a:ext cx="10911535" cy="731520"/>
           </a:xfrm>
           <a:prstGeom prst="rect">
             <a:avLst/>
@@ -4165,27 +3817,27 @@
           <a:p>
             <a:pPr algn="ctr"/>
             <a:r>
-              <a:rPr sz="2200" b="0" i="1">
-                <a:solidFill>
-                  <a:srgbClr val="8C8C8C"/>
+              <a:rPr sz="4800" b="1" i="0">
+                <a:solidFill>
+                  <a:srgbClr val="FFFFFF"/>
                 </a:solidFill>
                 <a:latin typeface="Arial"/>
               </a:rPr>
-              <a:t/>
-            </a:r>
-          </a:p>
-        </p:txBody>
-      </p:sp>
-      <p:sp>
-        <p:nvSpPr>
-          <p:cNvPr id="4" name="TextBox 3"/>
+              <a:t>罪ある目には　隠れても</a:t>
+            </a:r>
+          </a:p>
+        </p:txBody>
+      </p:sp>
+      <p:sp>
+        <p:nvSpPr>
+          <p:cNvPr id="3" name="TextBox 2"/>
           <p:cNvSpPr txBox="1"/>
           <p:nvPr/>
         </p:nvSpPr>
         <p:spPr>
           <a:xfrm>
-            <a:off x="594360" y="3529584"/>
-            <a:ext cx="11002975" cy="685800"/>
+            <a:off x="640080" y="3268980"/>
+            <a:ext cx="10911535" cy="365760"/>
           </a:xfrm>
           <a:prstGeom prst="rect">
             <a:avLst/>
@@ -4200,27 +3852,27 @@
           <a:p>
             <a:pPr algn="ctr"/>
             <a:r>
-              <a:rPr sz="4400" b="1" i="0">
-                <a:solidFill>
-                  <a:srgbClr val="FFFFFF"/>
+              <a:rPr sz="2400" b="0" i="1">
+                <a:solidFill>
+                  <a:srgbClr val="AAAAAA"/>
                 </a:solidFill>
                 <a:latin typeface="Arial"/>
               </a:rPr>
-              <a:t/>
-            </a:r>
-          </a:p>
-        </p:txBody>
-      </p:sp>
-      <p:sp>
-        <p:nvSpPr>
-          <p:cNvPr id="5" name="TextBox 4"/>
+              <a:t>tsumi aru meni ha kakure temo</a:t>
+            </a:r>
+          </a:p>
+        </p:txBody>
+      </p:sp>
+      <p:sp>
+        <p:nvSpPr>
+          <p:cNvPr id="4" name="TextBox 3"/>
           <p:cNvSpPr txBox="1"/>
           <p:nvPr/>
         </p:nvSpPr>
         <p:spPr>
           <a:xfrm>
-            <a:off x="594360" y="4251960"/>
-            <a:ext cx="11002975" cy="347472"/>
+            <a:off x="640080" y="4046220"/>
+            <a:ext cx="10911535" cy="310896"/>
           </a:xfrm>
           <a:prstGeom prst="rect">
             <a:avLst/>
@@ -4235,13 +3887,266 @@
           <a:p>
             <a:pPr algn="ctr"/>
             <a:r>
-              <a:rPr sz="2200" b="0" i="1">
-                <a:solidFill>
-                  <a:srgbClr val="8C8C8C"/>
+              <a:rPr sz="2000" b="0" i="1">
+                <a:solidFill>
+                  <a:srgbClr val="828282"/>
                 </a:solidFill>
                 <a:latin typeface="Arial"/>
               </a:rPr>
-              <a:t/>
+              <a:t>Senhor Deus Todo-Poderoso!</a:t>
+            </a:r>
+          </a:p>
+        </p:txBody>
+      </p:sp>
+    </p:spTree>
+  </p:cSld>
+  <p:clrMapOvr>
+    <a:masterClrMapping/>
+  </p:clrMapOvr>
+</p:sld>
+</file>
+
+<file path=ppt/slides/slide17.xml><?xml version="1.0" encoding="utf-8"?>
+<p:sld xmlns:a="http://schemas.openxmlformats.org/drawingml/2006/main" xmlns:p="http://schemas.openxmlformats.org/presentationml/2006/main" xmlns:r="http://schemas.openxmlformats.org/officeDocument/2006/relationships">
+  <p:cSld>
+    <p:bg>
+      <p:bgPr>
+        <a:solidFill>
+          <a:srgbClr val="000000"/>
+        </a:solidFill>
+        <a:effectLst/>
+      </p:bgPr>
+    </p:bg>
+    <p:spTree>
+      <p:nvGrpSpPr>
+        <p:cNvPr id="1" name=""/>
+        <p:cNvGrpSpPr/>
+        <p:nvPr/>
+      </p:nvGrpSpPr>
+      <p:grpSpPr/>
+      <p:sp>
+        <p:nvSpPr>
+          <p:cNvPr id="2" name="TextBox 1"/>
+          <p:cNvSpPr txBox="1"/>
+          <p:nvPr/>
+        </p:nvSpPr>
+        <p:spPr>
+          <a:xfrm>
+            <a:off x="640080" y="2702052"/>
+            <a:ext cx="10911535" cy="731520"/>
+          </a:xfrm>
+          <a:prstGeom prst="rect">
+            <a:avLst/>
+          </a:prstGeom>
+          <a:noFill/>
+        </p:spPr>
+        <p:txBody>
+          <a:bodyPr wrap="square">
+            <a:spAutoFit/>
+          </a:bodyPr>
+          <a:lstStyle/>
+          <a:p>
+            <a:pPr algn="ctr"/>
+            <a:r>
+              <a:rPr sz="4800" b="1" i="0">
+                <a:solidFill>
+                  <a:srgbClr val="FFFFFF"/>
+                </a:solidFill>
+                <a:latin typeface="Arial"/>
+              </a:rPr>
+              <a:t>Benedita Trindade!</a:t>
+            </a:r>
+          </a:p>
+        </p:txBody>
+      </p:sp>
+    </p:spTree>
+  </p:cSld>
+  <p:clrMapOvr>
+    <a:masterClrMapping/>
+  </p:clrMapOvr>
+</p:sld>
+</file>
+
+<file path=ppt/slides/slide18.xml><?xml version="1.0" encoding="utf-8"?>
+<p:sld xmlns:a="http://schemas.openxmlformats.org/drawingml/2006/main" xmlns:p="http://schemas.openxmlformats.org/presentationml/2006/main" xmlns:r="http://schemas.openxmlformats.org/officeDocument/2006/relationships">
+  <p:cSld>
+    <p:bg>
+      <p:bgPr>
+        <a:solidFill>
+          <a:srgbClr val="000000"/>
+        </a:solidFill>
+        <a:effectLst/>
+      </p:bgPr>
+    </p:bg>
+    <p:spTree>
+      <p:nvGrpSpPr>
+        <p:cNvPr id="1" name=""/>
+        <p:cNvGrpSpPr/>
+        <p:nvPr/>
+      </p:nvGrpSpPr>
+      <p:grpSpPr/>
+      <p:sp>
+        <p:nvSpPr>
+          <p:cNvPr id="2" name="TextBox 1"/>
+          <p:cNvSpPr txBox="1"/>
+          <p:nvPr/>
+        </p:nvSpPr>
+        <p:spPr>
+          <a:xfrm>
+            <a:off x="640080" y="2500884"/>
+            <a:ext cx="10911535" cy="731520"/>
+          </a:xfrm>
+          <a:prstGeom prst="rect">
+            <a:avLst/>
+          </a:prstGeom>
+          <a:noFill/>
+        </p:spPr>
+        <p:txBody>
+          <a:bodyPr wrap="square">
+            <a:spAutoFit/>
+          </a:bodyPr>
+          <a:lstStyle/>
+          <a:p>
+            <a:pPr algn="ctr"/>
+            <a:r>
+              <a:rPr sz="4800" b="1" i="0">
+                <a:solidFill>
+                  <a:srgbClr val="FFFFFF"/>
+                </a:solidFill>
+                <a:latin typeface="Arial"/>
+              </a:rPr>
+              <a:t>並ぶものなき　聖なる神</a:t>
+            </a:r>
+          </a:p>
+        </p:txBody>
+      </p:sp>
+      <p:sp>
+        <p:nvSpPr>
+          <p:cNvPr id="3" name="TextBox 2"/>
+          <p:cNvSpPr txBox="1"/>
+          <p:nvPr/>
+        </p:nvSpPr>
+        <p:spPr>
+          <a:xfrm>
+            <a:off x="640080" y="3268980"/>
+            <a:ext cx="10911535" cy="365760"/>
+          </a:xfrm>
+          <a:prstGeom prst="rect">
+            <a:avLst/>
+          </a:prstGeom>
+          <a:noFill/>
+        </p:spPr>
+        <p:txBody>
+          <a:bodyPr wrap="square">
+            <a:spAutoFit/>
+          </a:bodyPr>
+          <a:lstStyle/>
+          <a:p>
+            <a:pPr algn="ctr"/>
+            <a:r>
+              <a:rPr sz="2400" b="0" i="1">
+                <a:solidFill>
+                  <a:srgbClr val="AAAAAA"/>
+                </a:solidFill>
+                <a:latin typeface="Arial"/>
+              </a:rPr>
+              <a:t>narabu mononaki hijiri naru kami</a:t>
+            </a:r>
+          </a:p>
+        </p:txBody>
+      </p:sp>
+      <p:sp>
+        <p:nvSpPr>
+          <p:cNvPr id="4" name="TextBox 3"/>
+          <p:cNvSpPr txBox="1"/>
+          <p:nvPr/>
+        </p:nvSpPr>
+        <p:spPr>
+          <a:xfrm>
+            <a:off x="640080" y="4046220"/>
+            <a:ext cx="10911535" cy="310896"/>
+          </a:xfrm>
+          <a:prstGeom prst="rect">
+            <a:avLst/>
+          </a:prstGeom>
+          <a:noFill/>
+        </p:spPr>
+        <p:txBody>
+          <a:bodyPr wrap="square">
+            <a:spAutoFit/>
+          </a:bodyPr>
+          <a:lstStyle/>
+          <a:p>
+            <a:pPr algn="ctr"/>
+            <a:r>
+              <a:rPr sz="2000" b="0" i="1">
+                <a:solidFill>
+                  <a:srgbClr val="828282"/>
+                </a:solidFill>
+                <a:latin typeface="Arial"/>
+              </a:rPr>
+              <a:t>Senhor Deus Todo-Poderoso!</a:t>
+            </a:r>
+          </a:p>
+        </p:txBody>
+      </p:sp>
+    </p:spTree>
+  </p:cSld>
+  <p:clrMapOvr>
+    <a:masterClrMapping/>
+  </p:clrMapOvr>
+</p:sld>
+</file>
+
+<file path=ppt/slides/slide19.xml><?xml version="1.0" encoding="utf-8"?>
+<p:sld xmlns:a="http://schemas.openxmlformats.org/drawingml/2006/main" xmlns:p="http://schemas.openxmlformats.org/presentationml/2006/main" xmlns:r="http://schemas.openxmlformats.org/officeDocument/2006/relationships">
+  <p:cSld>
+    <p:bg>
+      <p:bgPr>
+        <a:solidFill>
+          <a:srgbClr val="000000"/>
+        </a:solidFill>
+        <a:effectLst/>
+      </p:bgPr>
+    </p:bg>
+    <p:spTree>
+      <p:nvGrpSpPr>
+        <p:cNvPr id="1" name=""/>
+        <p:cNvGrpSpPr/>
+        <p:nvPr/>
+      </p:nvGrpSpPr>
+      <p:grpSpPr/>
+      <p:sp>
+        <p:nvSpPr>
+          <p:cNvPr id="2" name="TextBox 1"/>
+          <p:cNvSpPr txBox="1"/>
+          <p:nvPr/>
+        </p:nvSpPr>
+        <p:spPr>
+          <a:xfrm>
+            <a:off x="640080" y="2702052"/>
+            <a:ext cx="10911535" cy="731520"/>
+          </a:xfrm>
+          <a:prstGeom prst="rect">
+            <a:avLst/>
+          </a:prstGeom>
+          <a:noFill/>
+        </p:spPr>
+        <p:txBody>
+          <a:bodyPr wrap="square">
+            <a:spAutoFit/>
+          </a:bodyPr>
+          <a:lstStyle/>
+          <a:p>
+            <a:pPr algn="ctr"/>
+            <a:r>
+              <a:rPr sz="4800" b="1" i="0">
+                <a:solidFill>
+                  <a:srgbClr val="FFFFFF"/>
+                </a:solidFill>
+                <a:latin typeface="Arial"/>
+              </a:rPr>
+              <a:t>Santo, Santo, Santo!</a:t>
             </a:r>
           </a:p>
         </p:txBody>
@@ -4280,8 +4185,8 @@
         </p:nvSpPr>
         <p:spPr>
           <a:xfrm>
-            <a:off x="594360" y="2258568"/>
-            <a:ext cx="11002975" cy="685800"/>
+            <a:off x="640080" y="2702052"/>
+            <a:ext cx="10911535" cy="731520"/>
           </a:xfrm>
           <a:prstGeom prst="rect">
             <a:avLst/>
@@ -4296,27 +4201,53 @@
           <a:p>
             <a:pPr algn="ctr"/>
             <a:r>
-              <a:rPr sz="4400" b="1" i="0">
+              <a:rPr sz="4800" b="1" i="0">
                 <a:solidFill>
                   <a:srgbClr val="FFFFFF"/>
                 </a:solidFill>
                 <a:latin typeface="Arial"/>
               </a:rPr>
-              <a:t>Nossa canção soa para Ti;</a:t>
-            </a:r>
-          </a:p>
-        </p:txBody>
-      </p:sp>
-      <p:sp>
-        <p:nvSpPr>
-          <p:cNvPr id="3" name="TextBox 2"/>
+              <a:t>Senhor Deus Todo-Poderoso!</a:t>
+            </a:r>
+          </a:p>
+        </p:txBody>
+      </p:sp>
+    </p:spTree>
+  </p:cSld>
+  <p:clrMapOvr>
+    <a:masterClrMapping/>
+  </p:clrMapOvr>
+</p:sld>
+</file>
+
+<file path=ppt/slides/slide20.xml><?xml version="1.0" encoding="utf-8"?>
+<p:sld xmlns:a="http://schemas.openxmlformats.org/drawingml/2006/main" xmlns:p="http://schemas.openxmlformats.org/presentationml/2006/main" xmlns:r="http://schemas.openxmlformats.org/officeDocument/2006/relationships">
+  <p:cSld>
+    <p:bg>
+      <p:bgPr>
+        <a:solidFill>
+          <a:srgbClr val="000000"/>
+        </a:solidFill>
+        <a:effectLst/>
+      </p:bgPr>
+    </p:bg>
+    <p:spTree>
+      <p:nvGrpSpPr>
+        <p:cNvPr id="1" name=""/>
+        <p:cNvGrpSpPr/>
+        <p:nvPr/>
+      </p:nvGrpSpPr>
+      <p:grpSpPr/>
+      <p:sp>
+        <p:nvSpPr>
+          <p:cNvPr id="2" name="TextBox 1"/>
           <p:cNvSpPr txBox="1"/>
           <p:nvPr/>
         </p:nvSpPr>
         <p:spPr>
           <a:xfrm>
-            <a:off x="594360" y="2980944"/>
-            <a:ext cx="11002975" cy="347472"/>
+            <a:off x="640080" y="2500884"/>
+            <a:ext cx="10911535" cy="731520"/>
           </a:xfrm>
           <a:prstGeom prst="rect">
             <a:avLst/>
@@ -4331,27 +4262,27 @@
           <a:p>
             <a:pPr algn="ctr"/>
             <a:r>
-              <a:rPr sz="2200" b="0" i="1">
-                <a:solidFill>
-                  <a:srgbClr val="8C8C8C"/>
+              <a:rPr sz="4800" b="1" i="0">
+                <a:solidFill>
+                  <a:srgbClr val="FFFFFF"/>
                 </a:solidFill>
                 <a:latin typeface="Arial"/>
               </a:rPr>
-              <a:t/>
-            </a:r>
-          </a:p>
-        </p:txBody>
-      </p:sp>
-      <p:sp>
-        <p:nvSpPr>
-          <p:cNvPr id="4" name="TextBox 3"/>
+              <a:t>愛と力の　栄えの主</a:t>
+            </a:r>
+          </a:p>
+        </p:txBody>
+      </p:sp>
+      <p:sp>
+        <p:nvSpPr>
+          <p:cNvPr id="3" name="TextBox 2"/>
           <p:cNvSpPr txBox="1"/>
           <p:nvPr/>
         </p:nvSpPr>
         <p:spPr>
           <a:xfrm>
-            <a:off x="594360" y="3529584"/>
-            <a:ext cx="11002975" cy="685800"/>
+            <a:off x="640080" y="3268980"/>
+            <a:ext cx="10911535" cy="365760"/>
           </a:xfrm>
           <a:prstGeom prst="rect">
             <a:avLst/>
@@ -4366,27 +4297,27 @@
           <a:p>
             <a:pPr algn="ctr"/>
             <a:r>
-              <a:rPr sz="4400" b="1" i="0">
-                <a:solidFill>
-                  <a:srgbClr val="FFFFFF"/>
+              <a:rPr sz="2400" b="0" i="1">
+                <a:solidFill>
+                  <a:srgbClr val="AAAAAA"/>
                 </a:solidFill>
                 <a:latin typeface="Arial"/>
               </a:rPr>
-              <a:t>Santo, Santo, Santo!</a:t>
-            </a:r>
-          </a:p>
-        </p:txBody>
-      </p:sp>
-      <p:sp>
-        <p:nvSpPr>
-          <p:cNvPr id="5" name="TextBox 4"/>
+              <a:t>ai to chikara no sakae no shu</a:t>
+            </a:r>
+          </a:p>
+        </p:txBody>
+      </p:sp>
+      <p:sp>
+        <p:nvSpPr>
+          <p:cNvPr id="4" name="TextBox 3"/>
           <p:cNvSpPr txBox="1"/>
           <p:nvPr/>
         </p:nvSpPr>
         <p:spPr>
           <a:xfrm>
-            <a:off x="594360" y="4251960"/>
-            <a:ext cx="11002975" cy="347472"/>
+            <a:off x="640080" y="4046220"/>
+            <a:ext cx="10911535" cy="310896"/>
           </a:xfrm>
           <a:prstGeom prst="rect">
             <a:avLst/>
@@ -4401,9 +4332,585 @@
           <a:p>
             <a:pPr algn="ctr"/>
             <a:r>
-              <a:rPr sz="2200" b="0" i="1">
-                <a:solidFill>
-                  <a:srgbClr val="8C8C8C"/>
+              <a:rPr sz="2000" b="0" i="1">
+                <a:solidFill>
+                  <a:srgbClr val="828282"/>
+                </a:solidFill>
+                <a:latin typeface="Arial"/>
+              </a:rPr>
+              <a:t>Senhor Deus Todo-Poderoso!</a:t>
+            </a:r>
+          </a:p>
+        </p:txBody>
+      </p:sp>
+    </p:spTree>
+  </p:cSld>
+  <p:clrMapOvr>
+    <a:masterClrMapping/>
+  </p:clrMapOvr>
+</p:sld>
+</file>
+
+<file path=ppt/slides/slide21.xml><?xml version="1.0" encoding="utf-8"?>
+<p:sld xmlns:a="http://schemas.openxmlformats.org/drawingml/2006/main" xmlns:p="http://schemas.openxmlformats.org/presentationml/2006/main" xmlns:r="http://schemas.openxmlformats.org/officeDocument/2006/relationships">
+  <p:cSld>
+    <p:bg>
+      <p:bgPr>
+        <a:solidFill>
+          <a:srgbClr val="000000"/>
+        </a:solidFill>
+        <a:effectLst/>
+      </p:bgPr>
+    </p:bg>
+    <p:spTree>
+      <p:nvGrpSpPr>
+        <p:cNvPr id="1" name=""/>
+        <p:cNvGrpSpPr/>
+        <p:nvPr/>
+      </p:nvGrpSpPr>
+      <p:grpSpPr/>
+      <p:sp>
+        <p:nvSpPr>
+          <p:cNvPr id="2" name="TextBox 1"/>
+          <p:cNvSpPr txBox="1"/>
+          <p:nvPr/>
+        </p:nvSpPr>
+        <p:spPr>
+          <a:xfrm>
+            <a:off x="640080" y="2052828"/>
+            <a:ext cx="10911535" cy="731520"/>
+          </a:xfrm>
+          <a:prstGeom prst="rect">
+            <a:avLst/>
+          </a:prstGeom>
+          <a:noFill/>
+        </p:spPr>
+        <p:txBody>
+          <a:bodyPr wrap="square">
+            <a:spAutoFit/>
+          </a:bodyPr>
+          <a:lstStyle/>
+          <a:p>
+            <a:pPr algn="ctr"/>
+            <a:r>
+              <a:rPr sz="4800" b="1" i="0">
+                <a:solidFill>
+                  <a:srgbClr val="FFFFFF"/>
+                </a:solidFill>
+                <a:latin typeface="Arial"/>
+              </a:rPr>
+              <a:t>Todas as tuas obras louvarão</a:t>
+            </a:r>
+          </a:p>
+        </p:txBody>
+      </p:sp>
+      <p:sp>
+        <p:nvSpPr>
+          <p:cNvPr id="3" name="TextBox 2"/>
+          <p:cNvSpPr txBox="1"/>
+          <p:nvPr/>
+        </p:nvSpPr>
+        <p:spPr>
+          <a:xfrm>
+            <a:off x="640080" y="2985516"/>
+            <a:ext cx="10911535" cy="731520"/>
+          </a:xfrm>
+          <a:prstGeom prst="rect">
+            <a:avLst/>
+          </a:prstGeom>
+          <a:noFill/>
+        </p:spPr>
+        <p:txBody>
+          <a:bodyPr wrap="square">
+            <a:spAutoFit/>
+          </a:bodyPr>
+          <a:lstStyle/>
+          <a:p>
+            <a:pPr algn="ctr"/>
+            <a:r>
+              <a:rPr sz="4800" b="1" i="0">
+                <a:solidFill>
+                  <a:srgbClr val="FFFFFF"/>
+                </a:solidFill>
+                <a:latin typeface="Arial"/>
+              </a:rPr>
+              <a:t/>
+            </a:r>
+          </a:p>
+        </p:txBody>
+      </p:sp>
+    </p:spTree>
+  </p:cSld>
+  <p:clrMapOvr>
+    <a:masterClrMapping/>
+  </p:clrMapOvr>
+</p:sld>
+</file>
+
+<file path=ppt/slides/slide22.xml><?xml version="1.0" encoding="utf-8"?>
+<p:sld xmlns:a="http://schemas.openxmlformats.org/drawingml/2006/main" xmlns:p="http://schemas.openxmlformats.org/presentationml/2006/main" xmlns:r="http://schemas.openxmlformats.org/officeDocument/2006/relationships">
+  <p:cSld>
+    <p:bg>
+      <p:bgPr>
+        <a:solidFill>
+          <a:srgbClr val="000000"/>
+        </a:solidFill>
+        <a:effectLst/>
+      </p:bgPr>
+    </p:bg>
+    <p:spTree>
+      <p:nvGrpSpPr>
+        <p:cNvPr id="1" name=""/>
+        <p:cNvGrpSpPr/>
+        <p:nvPr/>
+      </p:nvGrpSpPr>
+      <p:grpSpPr/>
+      <p:sp>
+        <p:nvSpPr>
+          <p:cNvPr id="2" name="TextBox 1"/>
+          <p:cNvSpPr txBox="1"/>
+          <p:nvPr/>
+        </p:nvSpPr>
+        <p:spPr>
+          <a:xfrm>
+            <a:off x="640080" y="2052828"/>
+            <a:ext cx="10911535" cy="731520"/>
+          </a:xfrm>
+          <a:prstGeom prst="rect">
+            <a:avLst/>
+          </a:prstGeom>
+          <a:noFill/>
+        </p:spPr>
+        <p:txBody>
+          <a:bodyPr wrap="square">
+            <a:spAutoFit/>
+          </a:bodyPr>
+          <a:lstStyle/>
+          <a:p>
+            <a:pPr algn="ctr"/>
+            <a:r>
+              <a:rPr sz="4800" b="1" i="0">
+                <a:solidFill>
+                  <a:srgbClr val="FFFFFF"/>
+                </a:solidFill>
+                <a:latin typeface="Arial"/>
+              </a:rPr>
+              <a:t/>
+            </a:r>
+          </a:p>
+        </p:txBody>
+      </p:sp>
+      <p:sp>
+        <p:nvSpPr>
+          <p:cNvPr id="3" name="TextBox 2"/>
+          <p:cNvSpPr txBox="1"/>
+          <p:nvPr/>
+        </p:nvSpPr>
+        <p:spPr>
+          <a:xfrm>
+            <a:off x="640080" y="2985516"/>
+            <a:ext cx="10911535" cy="731520"/>
+          </a:xfrm>
+          <a:prstGeom prst="rect">
+            <a:avLst/>
+          </a:prstGeom>
+          <a:noFill/>
+        </p:spPr>
+        <p:txBody>
+          <a:bodyPr wrap="square">
+            <a:spAutoFit/>
+          </a:bodyPr>
+          <a:lstStyle/>
+          <a:p>
+            <a:pPr algn="ctr"/>
+            <a:r>
+              <a:rPr sz="4800" b="1" i="0">
+                <a:solidFill>
+                  <a:srgbClr val="FFFFFF"/>
+                </a:solidFill>
+                <a:latin typeface="Arial"/>
+              </a:rPr>
+              <a:t/>
+            </a:r>
+          </a:p>
+        </p:txBody>
+      </p:sp>
+    </p:spTree>
+  </p:cSld>
+  <p:clrMapOvr>
+    <a:masterClrMapping/>
+  </p:clrMapOvr>
+</p:sld>
+</file>
+
+<file path=ppt/slides/slide23.xml><?xml version="1.0" encoding="utf-8"?>
+<p:sld xmlns:a="http://schemas.openxmlformats.org/drawingml/2006/main" xmlns:p="http://schemas.openxmlformats.org/presentationml/2006/main" xmlns:r="http://schemas.openxmlformats.org/officeDocument/2006/relationships">
+  <p:cSld>
+    <p:bg>
+      <p:bgPr>
+        <a:solidFill>
+          <a:srgbClr val="000000"/>
+        </a:solidFill>
+        <a:effectLst/>
+      </p:bgPr>
+    </p:bg>
+    <p:spTree>
+      <p:nvGrpSpPr>
+        <p:cNvPr id="1" name=""/>
+        <p:cNvGrpSpPr/>
+        <p:nvPr/>
+      </p:nvGrpSpPr>
+      <p:grpSpPr/>
+      <p:sp>
+        <p:nvSpPr>
+          <p:cNvPr id="2" name="TextBox 1"/>
+          <p:cNvSpPr txBox="1"/>
+          <p:nvPr/>
+        </p:nvSpPr>
+        <p:spPr>
+          <a:xfrm>
+            <a:off x="640080" y="2052828"/>
+            <a:ext cx="10911535" cy="731520"/>
+          </a:xfrm>
+          <a:prstGeom prst="rect">
+            <a:avLst/>
+          </a:prstGeom>
+          <a:noFill/>
+        </p:spPr>
+        <p:txBody>
+          <a:bodyPr wrap="square">
+            <a:spAutoFit/>
+          </a:bodyPr>
+          <a:lstStyle/>
+          <a:p>
+            <a:pPr algn="ctr"/>
+            <a:r>
+              <a:rPr sz="4800" b="1" i="0">
+                <a:solidFill>
+                  <a:srgbClr val="FFFFFF"/>
+                </a:solidFill>
+                <a:latin typeface="Arial"/>
+              </a:rPr>
+              <a:t/>
+            </a:r>
+          </a:p>
+        </p:txBody>
+      </p:sp>
+      <p:sp>
+        <p:nvSpPr>
+          <p:cNvPr id="3" name="TextBox 2"/>
+          <p:cNvSpPr txBox="1"/>
+          <p:nvPr/>
+        </p:nvSpPr>
+        <p:spPr>
+          <a:xfrm>
+            <a:off x="640080" y="2985516"/>
+            <a:ext cx="10911535" cy="731520"/>
+          </a:xfrm>
+          <a:prstGeom prst="rect">
+            <a:avLst/>
+          </a:prstGeom>
+          <a:noFill/>
+        </p:spPr>
+        <p:txBody>
+          <a:bodyPr wrap="square">
+            <a:spAutoFit/>
+          </a:bodyPr>
+          <a:lstStyle/>
+          <a:p>
+            <a:pPr algn="ctr"/>
+            <a:r>
+              <a:rPr sz="4800" b="1" i="0">
+                <a:solidFill>
+                  <a:srgbClr val="FFFFFF"/>
+                </a:solidFill>
+                <a:latin typeface="Arial"/>
+              </a:rPr>
+              <a:t/>
+            </a:r>
+          </a:p>
+        </p:txBody>
+      </p:sp>
+    </p:spTree>
+  </p:cSld>
+  <p:clrMapOvr>
+    <a:masterClrMapping/>
+  </p:clrMapOvr>
+</p:sld>
+</file>
+
+<file path=ppt/slides/slide24.xml><?xml version="1.0" encoding="utf-8"?>
+<p:sld xmlns:a="http://schemas.openxmlformats.org/drawingml/2006/main" xmlns:p="http://schemas.openxmlformats.org/presentationml/2006/main" xmlns:r="http://schemas.openxmlformats.org/officeDocument/2006/relationships">
+  <p:cSld>
+    <p:bg>
+      <p:bgPr>
+        <a:solidFill>
+          <a:srgbClr val="000000"/>
+        </a:solidFill>
+        <a:effectLst/>
+      </p:bgPr>
+    </p:bg>
+    <p:spTree>
+      <p:nvGrpSpPr>
+        <p:cNvPr id="1" name=""/>
+        <p:cNvGrpSpPr/>
+        <p:nvPr/>
+      </p:nvGrpSpPr>
+      <p:grpSpPr/>
+      <p:sp>
+        <p:nvSpPr>
+          <p:cNvPr id="2" name="TextBox 1"/>
+          <p:cNvSpPr txBox="1"/>
+          <p:nvPr/>
+        </p:nvSpPr>
+        <p:spPr>
+          <a:xfrm>
+            <a:off x="640080" y="2052828"/>
+            <a:ext cx="10911535" cy="731520"/>
+          </a:xfrm>
+          <a:prstGeom prst="rect">
+            <a:avLst/>
+          </a:prstGeom>
+          <a:noFill/>
+        </p:spPr>
+        <p:txBody>
+          <a:bodyPr wrap="square">
+            <a:spAutoFit/>
+          </a:bodyPr>
+          <a:lstStyle/>
+          <a:p>
+            <a:pPr algn="ctr"/>
+            <a:r>
+              <a:rPr sz="4800" b="1" i="0">
+                <a:solidFill>
+                  <a:srgbClr val="FFFFFF"/>
+                </a:solidFill>
+                <a:latin typeface="Arial"/>
+              </a:rPr>
+              <a:t/>
+            </a:r>
+          </a:p>
+        </p:txBody>
+      </p:sp>
+      <p:sp>
+        <p:nvSpPr>
+          <p:cNvPr id="3" name="TextBox 2"/>
+          <p:cNvSpPr txBox="1"/>
+          <p:nvPr/>
+        </p:nvSpPr>
+        <p:spPr>
+          <a:xfrm>
+            <a:off x="640080" y="2985516"/>
+            <a:ext cx="10911535" cy="731520"/>
+          </a:xfrm>
+          <a:prstGeom prst="rect">
+            <a:avLst/>
+          </a:prstGeom>
+          <a:noFill/>
+        </p:spPr>
+        <p:txBody>
+          <a:bodyPr wrap="square">
+            <a:spAutoFit/>
+          </a:bodyPr>
+          <a:lstStyle/>
+          <a:p>
+            <a:pPr algn="ctr"/>
+            <a:r>
+              <a:rPr sz="4800" b="1" i="0">
+                <a:solidFill>
+                  <a:srgbClr val="FFFFFF"/>
+                </a:solidFill>
+                <a:latin typeface="Arial"/>
+              </a:rPr>
+              <a:t/>
+            </a:r>
+          </a:p>
+        </p:txBody>
+      </p:sp>
+    </p:spTree>
+  </p:cSld>
+  <p:clrMapOvr>
+    <a:masterClrMapping/>
+  </p:clrMapOvr>
+</p:sld>
+</file>
+
+<file path=ppt/slides/slide25.xml><?xml version="1.0" encoding="utf-8"?>
+<p:sld xmlns:a="http://schemas.openxmlformats.org/drawingml/2006/main" xmlns:p="http://schemas.openxmlformats.org/presentationml/2006/main" xmlns:r="http://schemas.openxmlformats.org/officeDocument/2006/relationships">
+  <p:cSld>
+    <p:bg>
+      <p:bgPr>
+        <a:solidFill>
+          <a:srgbClr val="000000"/>
+        </a:solidFill>
+        <a:effectLst/>
+      </p:bgPr>
+    </p:bg>
+    <p:spTree>
+      <p:nvGrpSpPr>
+        <p:cNvPr id="1" name=""/>
+        <p:cNvGrpSpPr/>
+        <p:nvPr/>
+      </p:nvGrpSpPr>
+      <p:grpSpPr/>
+      <p:sp>
+        <p:nvSpPr>
+          <p:cNvPr id="2" name="TextBox 1"/>
+          <p:cNvSpPr txBox="1"/>
+          <p:nvPr/>
+        </p:nvSpPr>
+        <p:spPr>
+          <a:xfrm>
+            <a:off x="640080" y="2052828"/>
+            <a:ext cx="10911535" cy="731520"/>
+          </a:xfrm>
+          <a:prstGeom prst="rect">
+            <a:avLst/>
+          </a:prstGeom>
+          <a:noFill/>
+        </p:spPr>
+        <p:txBody>
+          <a:bodyPr wrap="square">
+            <a:spAutoFit/>
+          </a:bodyPr>
+          <a:lstStyle/>
+          <a:p>
+            <a:pPr algn="ctr"/>
+            <a:r>
+              <a:rPr sz="4800" b="1" i="0">
+                <a:solidFill>
+                  <a:srgbClr val="FFFFFF"/>
+                </a:solidFill>
+                <a:latin typeface="Arial"/>
+              </a:rPr>
+              <a:t/>
+            </a:r>
+          </a:p>
+        </p:txBody>
+      </p:sp>
+      <p:sp>
+        <p:nvSpPr>
+          <p:cNvPr id="3" name="TextBox 2"/>
+          <p:cNvSpPr txBox="1"/>
+          <p:nvPr/>
+        </p:nvSpPr>
+        <p:spPr>
+          <a:xfrm>
+            <a:off x="640080" y="2985516"/>
+            <a:ext cx="10911535" cy="731520"/>
+          </a:xfrm>
+          <a:prstGeom prst="rect">
+            <a:avLst/>
+          </a:prstGeom>
+          <a:noFill/>
+        </p:spPr>
+        <p:txBody>
+          <a:bodyPr wrap="square">
+            <a:spAutoFit/>
+          </a:bodyPr>
+          <a:lstStyle/>
+          <a:p>
+            <a:pPr algn="ctr"/>
+            <a:r>
+              <a:rPr sz="4800" b="1" i="0">
+                <a:solidFill>
+                  <a:srgbClr val="FFFFFF"/>
+                </a:solidFill>
+                <a:latin typeface="Arial"/>
+              </a:rPr>
+              <a:t/>
+            </a:r>
+          </a:p>
+        </p:txBody>
+      </p:sp>
+    </p:spTree>
+  </p:cSld>
+  <p:clrMapOvr>
+    <a:masterClrMapping/>
+  </p:clrMapOvr>
+</p:sld>
+</file>
+
+<file path=ppt/slides/slide26.xml><?xml version="1.0" encoding="utf-8"?>
+<p:sld xmlns:a="http://schemas.openxmlformats.org/drawingml/2006/main" xmlns:p="http://schemas.openxmlformats.org/presentationml/2006/main" xmlns:r="http://schemas.openxmlformats.org/officeDocument/2006/relationships">
+  <p:cSld>
+    <p:bg>
+      <p:bgPr>
+        <a:solidFill>
+          <a:srgbClr val="000000"/>
+        </a:solidFill>
+        <a:effectLst/>
+      </p:bgPr>
+    </p:bg>
+    <p:spTree>
+      <p:nvGrpSpPr>
+        <p:cNvPr id="1" name=""/>
+        <p:cNvGrpSpPr/>
+        <p:nvPr/>
+      </p:nvGrpSpPr>
+      <p:grpSpPr/>
+      <p:sp>
+        <p:nvSpPr>
+          <p:cNvPr id="2" name="TextBox 1"/>
+          <p:cNvSpPr txBox="1"/>
+          <p:nvPr/>
+        </p:nvSpPr>
+        <p:spPr>
+          <a:xfrm>
+            <a:off x="640080" y="2052828"/>
+            <a:ext cx="10911535" cy="731520"/>
+          </a:xfrm>
+          <a:prstGeom prst="rect">
+            <a:avLst/>
+          </a:prstGeom>
+          <a:noFill/>
+        </p:spPr>
+        <p:txBody>
+          <a:bodyPr wrap="square">
+            <a:spAutoFit/>
+          </a:bodyPr>
+          <a:lstStyle/>
+          <a:p>
+            <a:pPr algn="ctr"/>
+            <a:r>
+              <a:rPr sz="4800" b="1" i="0">
+                <a:solidFill>
+                  <a:srgbClr val="FFFFFF"/>
+                </a:solidFill>
+                <a:latin typeface="Arial"/>
+              </a:rPr>
+              <a:t/>
+            </a:r>
+          </a:p>
+        </p:txBody>
+      </p:sp>
+      <p:sp>
+        <p:nvSpPr>
+          <p:cNvPr id="3" name="TextBox 2"/>
+          <p:cNvSpPr txBox="1"/>
+          <p:nvPr/>
+        </p:nvSpPr>
+        <p:spPr>
+          <a:xfrm>
+            <a:off x="640080" y="2985516"/>
+            <a:ext cx="10911535" cy="731520"/>
+          </a:xfrm>
+          <a:prstGeom prst="rect">
+            <a:avLst/>
+          </a:prstGeom>
+          <a:noFill/>
+        </p:spPr>
+        <p:txBody>
+          <a:bodyPr wrap="square">
+            <a:spAutoFit/>
+          </a:bodyPr>
+          <a:lstStyle/>
+          <a:p>
+            <a:pPr algn="ctr"/>
+            <a:r>
+              <a:rPr sz="4800" b="1" i="0">
+                <a:solidFill>
+                  <a:srgbClr val="FFFFFF"/>
                 </a:solidFill>
                 <a:latin typeface="Arial"/>
               </a:rPr>
@@ -4446,8 +4953,8 @@
         </p:nvSpPr>
         <p:spPr>
           <a:xfrm>
-            <a:off x="594360" y="2258568"/>
-            <a:ext cx="11002975" cy="685800"/>
+            <a:off x="640080" y="2500884"/>
+            <a:ext cx="10911535" cy="731520"/>
           </a:xfrm>
           <a:prstGeom prst="rect">
             <a:avLst/>
@@ -4462,13 +4969,13 @@
           <a:p>
             <a:pPr algn="ctr"/>
             <a:r>
-              <a:rPr sz="4400" b="1" i="0">
+              <a:rPr sz="4800" b="1" i="0">
                 <a:solidFill>
                   <a:srgbClr val="FFFFFF"/>
                 </a:solidFill>
                 <a:latin typeface="Arial"/>
               </a:rPr>
-              <a:t>Misericordioso e Poderoso!</a:t>
+              <a:t>われらの讃美を　受けたまえ</a:t>
             </a:r>
           </a:p>
         </p:txBody>
@@ -4481,8 +4988,8 @@
         </p:nvSpPr>
         <p:spPr>
           <a:xfrm>
-            <a:off x="594360" y="2980944"/>
-            <a:ext cx="11002975" cy="347472"/>
+            <a:off x="640080" y="3268980"/>
+            <a:ext cx="10911535" cy="365760"/>
           </a:xfrm>
           <a:prstGeom prst="rect">
             <a:avLst/>
@@ -4497,13 +5004,13 @@
           <a:p>
             <a:pPr algn="ctr"/>
             <a:r>
-              <a:rPr sz="2200" b="0" i="1">
-                <a:solidFill>
-                  <a:srgbClr val="8C8C8C"/>
+              <a:rPr sz="2400" b="0" i="1">
+                <a:solidFill>
+                  <a:srgbClr val="AAAAAA"/>
                 </a:solidFill>
                 <a:latin typeface="Arial"/>
               </a:rPr>
-              <a:t/>
+              <a:t>warerano sanbi wo uke tamae</a:t>
             </a:r>
           </a:p>
         </p:txBody>
@@ -4516,8 +5023,8 @@
         </p:nvSpPr>
         <p:spPr>
           <a:xfrm>
-            <a:off x="594360" y="3529584"/>
-            <a:ext cx="11002975" cy="685800"/>
+            <a:off x="640080" y="4046220"/>
+            <a:ext cx="10911535" cy="310896"/>
           </a:xfrm>
           <a:prstGeom prst="rect">
             <a:avLst/>
@@ -4532,48 +5039,13 @@
           <a:p>
             <a:pPr algn="ctr"/>
             <a:r>
-              <a:rPr sz="4400" b="1" i="0">
-                <a:solidFill>
-                  <a:srgbClr val="FFFFFF"/>
+              <a:rPr sz="2000" b="0" i="1">
+                <a:solidFill>
+                  <a:srgbClr val="828282"/>
                 </a:solidFill>
                 <a:latin typeface="Arial"/>
               </a:rPr>
-              <a:t>Deus em três pessoas,</a:t>
-            </a:r>
-          </a:p>
-        </p:txBody>
-      </p:sp>
-      <p:sp>
-        <p:nvSpPr>
-          <p:cNvPr id="5" name="TextBox 4"/>
-          <p:cNvSpPr txBox="1"/>
-          <p:nvPr/>
-        </p:nvSpPr>
-        <p:spPr>
-          <a:xfrm>
-            <a:off x="594360" y="4251960"/>
-            <a:ext cx="11002975" cy="347472"/>
-          </a:xfrm>
-          <a:prstGeom prst="rect">
-            <a:avLst/>
-          </a:prstGeom>
-          <a:noFill/>
-        </p:spPr>
-        <p:txBody>
-          <a:bodyPr wrap="square">
-            <a:spAutoFit/>
-          </a:bodyPr>
-          <a:lstStyle/>
-          <a:p>
-            <a:pPr algn="ctr"/>
-            <a:r>
-              <a:rPr sz="2200" b="0" i="1">
-                <a:solidFill>
-                  <a:srgbClr val="8C8C8C"/>
-                </a:solidFill>
-                <a:latin typeface="Arial"/>
-              </a:rPr>
-              <a:t/>
+              <a:t>Senhor Deus Todo-Poderoso!</a:t>
             </a:r>
           </a:p>
         </p:txBody>
@@ -4612,8 +5084,8 @@
         </p:nvSpPr>
         <p:spPr>
           <a:xfrm>
-            <a:off x="594360" y="2258568"/>
-            <a:ext cx="11002975" cy="685800"/>
+            <a:off x="640080" y="2702052"/>
+            <a:ext cx="10911535" cy="731520"/>
           </a:xfrm>
           <a:prstGeom prst="rect">
             <a:avLst/>
@@ -4628,118 +5100,13 @@
           <a:p>
             <a:pPr algn="ctr"/>
             <a:r>
-              <a:rPr sz="4400" b="1" i="0">
+              <a:rPr sz="4800" b="1" i="0">
                 <a:solidFill>
                   <a:srgbClr val="FFFFFF"/>
                 </a:solidFill>
                 <a:latin typeface="Arial"/>
               </a:rPr>
-              <a:t>Benedita Trindade!</a:t>
-            </a:r>
-          </a:p>
-        </p:txBody>
-      </p:sp>
-      <p:sp>
-        <p:nvSpPr>
-          <p:cNvPr id="3" name="TextBox 2"/>
-          <p:cNvSpPr txBox="1"/>
-          <p:nvPr/>
-        </p:nvSpPr>
-        <p:spPr>
-          <a:xfrm>
-            <a:off x="594360" y="2980944"/>
-            <a:ext cx="11002975" cy="347472"/>
-          </a:xfrm>
-          <a:prstGeom prst="rect">
-            <a:avLst/>
-          </a:prstGeom>
-          <a:noFill/>
-        </p:spPr>
-        <p:txBody>
-          <a:bodyPr wrap="square">
-            <a:spAutoFit/>
-          </a:bodyPr>
-          <a:lstStyle/>
-          <a:p>
-            <a:pPr algn="ctr"/>
-            <a:r>
-              <a:rPr sz="2200" b="0" i="1">
-                <a:solidFill>
-                  <a:srgbClr val="8C8C8C"/>
-                </a:solidFill>
-                <a:latin typeface="Arial"/>
-              </a:rPr>
-              <a:t/>
-            </a:r>
-          </a:p>
-        </p:txBody>
-      </p:sp>
-      <p:sp>
-        <p:nvSpPr>
-          <p:cNvPr id="4" name="TextBox 3"/>
-          <p:cNvSpPr txBox="1"/>
-          <p:nvPr/>
-        </p:nvSpPr>
-        <p:spPr>
-          <a:xfrm>
-            <a:off x="594360" y="3529584"/>
-            <a:ext cx="11002975" cy="685800"/>
-          </a:xfrm>
-          <a:prstGeom prst="rect">
-            <a:avLst/>
-          </a:prstGeom>
-          <a:noFill/>
-        </p:spPr>
-        <p:txBody>
-          <a:bodyPr wrap="square">
-            <a:spAutoFit/>
-          </a:bodyPr>
-          <a:lstStyle/>
-          <a:p>
-            <a:pPr algn="ctr"/>
-            <a:r>
-              <a:rPr sz="4400" b="1" i="0">
-                <a:solidFill>
-                  <a:srgbClr val="FFFFFF"/>
-                </a:solidFill>
-                <a:latin typeface="Arial"/>
-              </a:rPr>
-              <a:t>Santo, Santo, Santo!</a:t>
-            </a:r>
-          </a:p>
-        </p:txBody>
-      </p:sp>
-      <p:sp>
-        <p:nvSpPr>
-          <p:cNvPr id="5" name="TextBox 4"/>
-          <p:cNvSpPr txBox="1"/>
-          <p:nvPr/>
-        </p:nvSpPr>
-        <p:spPr>
-          <a:xfrm>
-            <a:off x="594360" y="4251960"/>
-            <a:ext cx="11002975" cy="347472"/>
-          </a:xfrm>
-          <a:prstGeom prst="rect">
-            <a:avLst/>
-          </a:prstGeom>
-          <a:noFill/>
-        </p:spPr>
-        <p:txBody>
-          <a:bodyPr wrap="square">
-            <a:spAutoFit/>
-          </a:bodyPr>
-          <a:lstStyle/>
-          <a:p>
-            <a:pPr algn="ctr"/>
-            <a:r>
-              <a:rPr sz="2200" b="0" i="1">
-                <a:solidFill>
-                  <a:srgbClr val="8C8C8C"/>
-                </a:solidFill>
-                <a:latin typeface="Arial"/>
-              </a:rPr>
-              <a:t/>
+              <a:t>Cedo pela manhã</a:t>
             </a:r>
           </a:p>
         </p:txBody>
@@ -4778,8 +5145,8 @@
         </p:nvSpPr>
         <p:spPr>
           <a:xfrm>
-            <a:off x="594360" y="2258568"/>
-            <a:ext cx="11002975" cy="685800"/>
+            <a:off x="640080" y="2500884"/>
+            <a:ext cx="10911535" cy="731520"/>
           </a:xfrm>
           <a:prstGeom prst="rect">
             <a:avLst/>
@@ -4794,13 +5161,13 @@
           <a:p>
             <a:pPr algn="ctr"/>
             <a:r>
-              <a:rPr sz="4400" b="1" i="0">
+              <a:rPr sz="4800" b="1" i="0">
                 <a:solidFill>
                   <a:srgbClr val="FFFFFF"/>
                 </a:solidFill>
                 <a:latin typeface="Arial"/>
               </a:rPr>
-              <a:t>Santo, Santo, Santo!</a:t>
+              <a:t>恵みにあふれ　力に満ち</a:t>
             </a:r>
           </a:p>
         </p:txBody>
@@ -4813,8 +5180,8 @@
         </p:nvSpPr>
         <p:spPr>
           <a:xfrm>
-            <a:off x="594360" y="2980944"/>
-            <a:ext cx="11002975" cy="347472"/>
+            <a:off x="640080" y="3268980"/>
+            <a:ext cx="10911535" cy="365760"/>
           </a:xfrm>
           <a:prstGeom prst="rect">
             <a:avLst/>
@@ -4829,13 +5196,13 @@
           <a:p>
             <a:pPr algn="ctr"/>
             <a:r>
-              <a:rPr sz="2200" b="0" i="1">
-                <a:solidFill>
-                  <a:srgbClr val="8C8C8C"/>
+              <a:rPr sz="2400" b="0" i="1">
+                <a:solidFill>
+                  <a:srgbClr val="AAAAAA"/>
                 </a:solidFill>
                 <a:latin typeface="Arial"/>
               </a:rPr>
-              <a:t/>
+              <a:t>megumi niafure chikara ni michi</a:t>
             </a:r>
           </a:p>
         </p:txBody>
@@ -4848,8 +5215,8 @@
         </p:nvSpPr>
         <p:spPr>
           <a:xfrm>
-            <a:off x="594360" y="3529584"/>
-            <a:ext cx="11002975" cy="685800"/>
+            <a:off x="640080" y="4046220"/>
+            <a:ext cx="10911535" cy="310896"/>
           </a:xfrm>
           <a:prstGeom prst="rect">
             <a:avLst/>
@@ -4864,48 +5231,13 @@
           <a:p>
             <a:pPr algn="ctr"/>
             <a:r>
-              <a:rPr sz="4400" b="1" i="0">
-                <a:solidFill>
-                  <a:srgbClr val="FFFFFF"/>
+              <a:rPr sz="2000" b="0" i="1">
+                <a:solidFill>
+                  <a:srgbClr val="828282"/>
                 </a:solidFill>
                 <a:latin typeface="Arial"/>
               </a:rPr>
               <a:t>Senhor Deus Todo-Poderoso!</a:t>
-            </a:r>
-          </a:p>
-        </p:txBody>
-      </p:sp>
-      <p:sp>
-        <p:nvSpPr>
-          <p:cNvPr id="5" name="TextBox 4"/>
-          <p:cNvSpPr txBox="1"/>
-          <p:nvPr/>
-        </p:nvSpPr>
-        <p:spPr>
-          <a:xfrm>
-            <a:off x="594360" y="4251960"/>
-            <a:ext cx="11002975" cy="347472"/>
-          </a:xfrm>
-          <a:prstGeom prst="rect">
-            <a:avLst/>
-          </a:prstGeom>
-          <a:noFill/>
-        </p:spPr>
-        <p:txBody>
-          <a:bodyPr wrap="square">
-            <a:spAutoFit/>
-          </a:bodyPr>
-          <a:lstStyle/>
-          <a:p>
-            <a:pPr algn="ctr"/>
-            <a:r>
-              <a:rPr sz="2200" b="0" i="1">
-                <a:solidFill>
-                  <a:srgbClr val="8C8C8C"/>
-                </a:solidFill>
-                <a:latin typeface="Arial"/>
-              </a:rPr>
-              <a:t/>
             </a:r>
           </a:p>
         </p:txBody>
@@ -4944,8 +5276,8 @@
         </p:nvSpPr>
         <p:spPr>
           <a:xfrm>
-            <a:off x="594360" y="2258568"/>
-            <a:ext cx="11002975" cy="685800"/>
+            <a:off x="640080" y="2702052"/>
+            <a:ext cx="10911535" cy="731520"/>
           </a:xfrm>
           <a:prstGeom prst="rect">
             <a:avLst/>
@@ -4960,118 +5292,13 @@
           <a:p>
             <a:pPr algn="ctr"/>
             <a:r>
-              <a:rPr sz="4400" b="1" i="0">
-                <a:solidFill>
-                  <a:srgbClr val="FFFFFF"/>
-                </a:solidFill>
-                <a:latin typeface="Arial"/>
-              </a:rPr>
-              <a:t>Cedo pela manhã</a:t>
-            </a:r>
-          </a:p>
-        </p:txBody>
-      </p:sp>
-      <p:sp>
-        <p:nvSpPr>
-          <p:cNvPr id="3" name="TextBox 2"/>
-          <p:cNvSpPr txBox="1"/>
-          <p:nvPr/>
-        </p:nvSpPr>
-        <p:spPr>
-          <a:xfrm>
-            <a:off x="594360" y="2980944"/>
-            <a:ext cx="11002975" cy="347472"/>
-          </a:xfrm>
-          <a:prstGeom prst="rect">
-            <a:avLst/>
-          </a:prstGeom>
-          <a:noFill/>
-        </p:spPr>
-        <p:txBody>
-          <a:bodyPr wrap="square">
-            <a:spAutoFit/>
-          </a:bodyPr>
-          <a:lstStyle/>
-          <a:p>
-            <a:pPr algn="ctr"/>
-            <a:r>
-              <a:rPr sz="2200" b="0" i="1">
-                <a:solidFill>
-                  <a:srgbClr val="8C8C8C"/>
-                </a:solidFill>
-                <a:latin typeface="Arial"/>
-              </a:rPr>
-              <a:t/>
-            </a:r>
-          </a:p>
-        </p:txBody>
-      </p:sp>
-      <p:sp>
-        <p:nvSpPr>
-          <p:cNvPr id="4" name="TextBox 3"/>
-          <p:cNvSpPr txBox="1"/>
-          <p:nvPr/>
-        </p:nvSpPr>
-        <p:spPr>
-          <a:xfrm>
-            <a:off x="594360" y="3529584"/>
-            <a:ext cx="11002975" cy="685800"/>
-          </a:xfrm>
-          <a:prstGeom prst="rect">
-            <a:avLst/>
-          </a:prstGeom>
-          <a:noFill/>
-        </p:spPr>
-        <p:txBody>
-          <a:bodyPr wrap="square">
-            <a:spAutoFit/>
-          </a:bodyPr>
-          <a:lstStyle/>
-          <a:p>
-            <a:pPr algn="ctr"/>
-            <a:r>
-              <a:rPr sz="4400" b="1" i="0">
+              <a:rPr sz="4800" b="1" i="0">
                 <a:solidFill>
                   <a:srgbClr val="FFFFFF"/>
                 </a:solidFill>
                 <a:latin typeface="Arial"/>
               </a:rPr>
               <a:t>Nossa canção soa para Ti;</a:t>
-            </a:r>
-          </a:p>
-        </p:txBody>
-      </p:sp>
-      <p:sp>
-        <p:nvSpPr>
-          <p:cNvPr id="5" name="TextBox 4"/>
-          <p:cNvSpPr txBox="1"/>
-          <p:nvPr/>
-        </p:nvSpPr>
-        <p:spPr>
-          <a:xfrm>
-            <a:off x="594360" y="4251960"/>
-            <a:ext cx="11002975" cy="347472"/>
-          </a:xfrm>
-          <a:prstGeom prst="rect">
-            <a:avLst/>
-          </a:prstGeom>
-          <a:noFill/>
-        </p:spPr>
-        <p:txBody>
-          <a:bodyPr wrap="square">
-            <a:spAutoFit/>
-          </a:bodyPr>
-          <a:lstStyle/>
-          <a:p>
-            <a:pPr algn="ctr"/>
-            <a:r>
-              <a:rPr sz="2200" b="0" i="1">
-                <a:solidFill>
-                  <a:srgbClr val="8C8C8C"/>
-                </a:solidFill>
-                <a:latin typeface="Arial"/>
-              </a:rPr>
-              <a:t/>
             </a:r>
           </a:p>
         </p:txBody>
@@ -5110,8 +5337,8 @@
         </p:nvSpPr>
         <p:spPr>
           <a:xfrm>
-            <a:off x="594360" y="2258568"/>
-            <a:ext cx="11002975" cy="685800"/>
+            <a:off x="640080" y="2500884"/>
+            <a:ext cx="10911535" cy="731520"/>
           </a:xfrm>
           <a:prstGeom prst="rect">
             <a:avLst/>
@@ -5126,13 +5353,13 @@
           <a:p>
             <a:pPr algn="ctr"/>
             <a:r>
-              <a:rPr sz="4400" b="1" i="0">
+              <a:rPr sz="4800" b="1" i="0">
                 <a:solidFill>
                   <a:srgbClr val="FFFFFF"/>
                 </a:solidFill>
                 <a:latin typeface="Arial"/>
               </a:rPr>
-              <a:t>Santo, Santo, Santo!</a:t>
+              <a:t>三つにいまして　ひとりの主</a:t>
             </a:r>
           </a:p>
         </p:txBody>
@@ -5145,8 +5372,8 @@
         </p:nvSpPr>
         <p:spPr>
           <a:xfrm>
-            <a:off x="594360" y="2980944"/>
-            <a:ext cx="11002975" cy="347472"/>
+            <a:off x="640080" y="3268980"/>
+            <a:ext cx="10911535" cy="365760"/>
           </a:xfrm>
           <a:prstGeom prst="rect">
             <a:avLst/>
@@ -5161,13 +5388,13 @@
           <a:p>
             <a:pPr algn="ctr"/>
             <a:r>
-              <a:rPr sz="2200" b="0" i="1">
-                <a:solidFill>
-                  <a:srgbClr val="8C8C8C"/>
+              <a:rPr sz="2400" b="0" i="1">
+                <a:solidFill>
+                  <a:srgbClr val="AAAAAA"/>
                 </a:solidFill>
                 <a:latin typeface="Arial"/>
               </a:rPr>
-              <a:t/>
+              <a:t>mittsu niimashite hitorino shu</a:t>
             </a:r>
           </a:p>
         </p:txBody>
@@ -5180,8 +5407,8 @@
         </p:nvSpPr>
         <p:spPr>
           <a:xfrm>
-            <a:off x="594360" y="3529584"/>
-            <a:ext cx="11002975" cy="685800"/>
+            <a:off x="640080" y="4046220"/>
+            <a:ext cx="10911535" cy="310896"/>
           </a:xfrm>
           <a:prstGeom prst="rect">
             <a:avLst/>
@@ -5196,48 +5423,13 @@
           <a:p>
             <a:pPr algn="ctr"/>
             <a:r>
-              <a:rPr sz="4400" b="1" i="0">
-                <a:solidFill>
-                  <a:srgbClr val="FFFFFF"/>
+              <a:rPr sz="2000" b="0" i="1">
+                <a:solidFill>
+                  <a:srgbClr val="828282"/>
                 </a:solidFill>
                 <a:latin typeface="Arial"/>
               </a:rPr>
-              <a:t>Misericordioso e Poderoso!</a:t>
-            </a:r>
-          </a:p>
-        </p:txBody>
-      </p:sp>
-      <p:sp>
-        <p:nvSpPr>
-          <p:cNvPr id="5" name="TextBox 4"/>
-          <p:cNvSpPr txBox="1"/>
-          <p:nvPr/>
-        </p:nvSpPr>
-        <p:spPr>
-          <a:xfrm>
-            <a:off x="594360" y="4251960"/>
-            <a:ext cx="11002975" cy="347472"/>
-          </a:xfrm>
-          <a:prstGeom prst="rect">
-            <a:avLst/>
-          </a:prstGeom>
-          <a:noFill/>
-        </p:spPr>
-        <p:txBody>
-          <a:bodyPr wrap="square">
-            <a:spAutoFit/>
-          </a:bodyPr>
-          <a:lstStyle/>
-          <a:p>
-            <a:pPr algn="ctr"/>
-            <a:r>
-              <a:rPr sz="2200" b="0" i="1">
-                <a:solidFill>
-                  <a:srgbClr val="8C8C8C"/>
-                </a:solidFill>
-                <a:latin typeface="Arial"/>
-              </a:rPr>
-              <a:t/>
+              <a:t>Senhor Deus Todo-Poderoso!</a:t>
             </a:r>
           </a:p>
         </p:txBody>
@@ -5276,8 +5468,8 @@
         </p:nvSpPr>
         <p:spPr>
           <a:xfrm>
-            <a:off x="594360" y="2258568"/>
-            <a:ext cx="11002975" cy="685800"/>
+            <a:off x="640080" y="2052828"/>
+            <a:ext cx="10911535" cy="731520"/>
           </a:xfrm>
           <a:prstGeom prst="rect">
             <a:avLst/>
@@ -5292,13 +5484,13 @@
           <a:p>
             <a:pPr algn="ctr"/>
             <a:r>
-              <a:rPr sz="4400" b="1" i="0">
+              <a:rPr sz="4800" b="1" i="0">
                 <a:solidFill>
                   <a:srgbClr val="FFFFFF"/>
                 </a:solidFill>
                 <a:latin typeface="Arial"/>
               </a:rPr>
-              <a:t>Deus em três pessoas,</a:t>
+              <a:t>Santo, Santo, Santo!</a:t>
             </a:r>
           </a:p>
         </p:txBody>
@@ -5311,8 +5503,8 @@
         </p:nvSpPr>
         <p:spPr>
           <a:xfrm>
-            <a:off x="594360" y="2980944"/>
-            <a:ext cx="11002975" cy="347472"/>
+            <a:off x="640080" y="2985516"/>
+            <a:ext cx="10911535" cy="731520"/>
           </a:xfrm>
           <a:prstGeom prst="rect">
             <a:avLst/>
@@ -5327,83 +5519,13 @@
           <a:p>
             <a:pPr algn="ctr"/>
             <a:r>
-              <a:rPr sz="2200" b="0" i="1">
-                <a:solidFill>
-                  <a:srgbClr val="8C8C8C"/>
+              <a:rPr sz="4800" b="1" i="0">
+                <a:solidFill>
+                  <a:srgbClr val="FFFFFF"/>
                 </a:solidFill>
                 <a:latin typeface="Arial"/>
               </a:rPr>
-              <a:t/>
-            </a:r>
-          </a:p>
-        </p:txBody>
-      </p:sp>
-      <p:sp>
-        <p:nvSpPr>
-          <p:cNvPr id="4" name="TextBox 3"/>
-          <p:cNvSpPr txBox="1"/>
-          <p:nvPr/>
-        </p:nvSpPr>
-        <p:spPr>
-          <a:xfrm>
-            <a:off x="594360" y="3529584"/>
-            <a:ext cx="11002975" cy="685800"/>
-          </a:xfrm>
-          <a:prstGeom prst="rect">
-            <a:avLst/>
-          </a:prstGeom>
-          <a:noFill/>
-        </p:spPr>
-        <p:txBody>
-          <a:bodyPr wrap="square">
-            <a:spAutoFit/>
-          </a:bodyPr>
-          <a:lstStyle/>
-          <a:p>
-            <a:pPr algn="ctr"/>
-            <a:r>
-              <a:rPr sz="4400" b="1" i="0">
-                <a:solidFill>
-                  <a:srgbClr val="FFFFFF"/>
-                </a:solidFill>
-                <a:latin typeface="Arial"/>
-              </a:rPr>
-              <a:t>Benedita Trindade!</a:t>
-            </a:r>
-          </a:p>
-        </p:txBody>
-      </p:sp>
-      <p:sp>
-        <p:nvSpPr>
-          <p:cNvPr id="5" name="TextBox 4"/>
-          <p:cNvSpPr txBox="1"/>
-          <p:nvPr/>
-        </p:nvSpPr>
-        <p:spPr>
-          <a:xfrm>
-            <a:off x="594360" y="4251960"/>
-            <a:ext cx="11002975" cy="347472"/>
-          </a:xfrm>
-          <a:prstGeom prst="rect">
-            <a:avLst/>
-          </a:prstGeom>
-          <a:noFill/>
-        </p:spPr>
-        <p:txBody>
-          <a:bodyPr wrap="square">
-            <a:spAutoFit/>
-          </a:bodyPr>
-          <a:lstStyle/>
-          <a:p>
-            <a:pPr algn="ctr"/>
-            <a:r>
-              <a:rPr sz="2200" b="0" i="1">
-                <a:solidFill>
-                  <a:srgbClr val="8C8C8C"/>
-                </a:solidFill>
-                <a:latin typeface="Arial"/>
-              </a:rPr>
-              <a:t/>
+              <a:t>Misericordioso e Poderoso!</a:t>
             </a:r>
           </a:p>
         </p:txBody>
@@ -5442,8 +5564,8 @@
         </p:nvSpPr>
         <p:spPr>
           <a:xfrm>
-            <a:off x="594360" y="2258568"/>
-            <a:ext cx="11002975" cy="685800"/>
+            <a:off x="640080" y="2052828"/>
+            <a:ext cx="10911535" cy="731520"/>
           </a:xfrm>
           <a:prstGeom prst="rect">
             <a:avLst/>
@@ -5458,13 +5580,13 @@
           <a:p>
             <a:pPr algn="ctr"/>
             <a:r>
-              <a:rPr sz="4400" b="1" i="0">
+              <a:rPr sz="4800" b="1" i="0">
                 <a:solidFill>
                   <a:srgbClr val="FFFFFF"/>
                 </a:solidFill>
                 <a:latin typeface="Arial"/>
               </a:rPr>
-              <a:t>Santo, Santo, Santo!</a:t>
+              <a:t>Deus em três pessoas,</a:t>
             </a:r>
           </a:p>
         </p:txBody>
@@ -5477,8 +5599,8 @@
         </p:nvSpPr>
         <p:spPr>
           <a:xfrm>
-            <a:off x="594360" y="2980944"/>
-            <a:ext cx="11002975" cy="347472"/>
+            <a:off x="640080" y="2985516"/>
+            <a:ext cx="10911535" cy="731520"/>
           </a:xfrm>
           <a:prstGeom prst="rect">
             <a:avLst/>
@@ -5493,83 +5615,13 @@
           <a:p>
             <a:pPr algn="ctr"/>
             <a:r>
-              <a:rPr sz="2200" b="0" i="1">
-                <a:solidFill>
-                  <a:srgbClr val="8C8C8C"/>
+              <a:rPr sz="4800" b="1" i="0">
+                <a:solidFill>
+                  <a:srgbClr val="FFFFFF"/>
                 </a:solidFill>
                 <a:latin typeface="Arial"/>
               </a:rPr>
-              <a:t/>
-            </a:r>
-          </a:p>
-        </p:txBody>
-      </p:sp>
-      <p:sp>
-        <p:nvSpPr>
-          <p:cNvPr id="4" name="TextBox 3"/>
-          <p:cNvSpPr txBox="1"/>
-          <p:nvPr/>
-        </p:nvSpPr>
-        <p:spPr>
-          <a:xfrm>
-            <a:off x="594360" y="3529584"/>
-            <a:ext cx="11002975" cy="685800"/>
-          </a:xfrm>
-          <a:prstGeom prst="rect">
-            <a:avLst/>
-          </a:prstGeom>
-          <a:noFill/>
-        </p:spPr>
-        <p:txBody>
-          <a:bodyPr wrap="square">
-            <a:spAutoFit/>
-          </a:bodyPr>
-          <a:lstStyle/>
-          <a:p>
-            <a:pPr algn="ctr"/>
-            <a:r>
-              <a:rPr sz="4400" b="1" i="0">
-                <a:solidFill>
-                  <a:srgbClr val="FFFFFF"/>
-                </a:solidFill>
-                <a:latin typeface="Arial"/>
-              </a:rPr>
-              <a:t>Todas as tuas obras louvarão</a:t>
-            </a:r>
-          </a:p>
-        </p:txBody>
-      </p:sp>
-      <p:sp>
-        <p:nvSpPr>
-          <p:cNvPr id="5" name="TextBox 4"/>
-          <p:cNvSpPr txBox="1"/>
-          <p:nvPr/>
-        </p:nvSpPr>
-        <p:spPr>
-          <a:xfrm>
-            <a:off x="594360" y="4251960"/>
-            <a:ext cx="11002975" cy="347472"/>
-          </a:xfrm>
-          <a:prstGeom prst="rect">
-            <a:avLst/>
-          </a:prstGeom>
-          <a:noFill/>
-        </p:spPr>
-        <p:txBody>
-          <a:bodyPr wrap="square">
-            <a:spAutoFit/>
-          </a:bodyPr>
-          <a:lstStyle/>
-          <a:p>
-            <a:pPr algn="ctr"/>
-            <a:r>
-              <a:rPr sz="2200" b="0" i="1">
-                <a:solidFill>
-                  <a:srgbClr val="8C8C8C"/>
-                </a:solidFill>
-                <a:latin typeface="Arial"/>
-              </a:rPr>
-              <a:t/>
+              <a:t>Benedita Trindade!</a:t>
             </a:r>
           </a:p>
         </p:txBody>

--- a/output_pptx/Holy_Holy_Holy_Lord_God_Almighty.pptx
+++ b/output_pptx/Holy_Holy_Holy_Lord_God_Almighty.pptx
@@ -3322,6 +3322,76 @@
           </a:p>
         </p:txBody>
       </p:sp>
+      <p:sp>
+        <p:nvSpPr>
+          <p:cNvPr id="4" name="TextBox 3"/>
+          <p:cNvSpPr txBox="1"/>
+          <p:nvPr/>
+        </p:nvSpPr>
+        <p:spPr>
+          <a:xfrm>
+            <a:off x="640080" y="4128516"/>
+            <a:ext cx="10911535" cy="310896"/>
+          </a:xfrm>
+          <a:prstGeom prst="rect">
+            <a:avLst/>
+          </a:prstGeom>
+          <a:noFill/>
+        </p:spPr>
+        <p:txBody>
+          <a:bodyPr wrap="square">
+            <a:spAutoFit/>
+          </a:bodyPr>
+          <a:lstStyle/>
+          <a:p>
+            <a:pPr algn="ctr"/>
+            <a:r>
+              <a:rPr sz="2000" b="0" i="0">
+                <a:solidFill>
+                  <a:srgbClr val="828282"/>
+                </a:solidFill>
+                <a:latin typeface="Arial"/>
+              </a:rPr>
+              <a:t>聖なるかな、聖なるかな、聖なるかな！</a:t>
+            </a:r>
+          </a:p>
+        </p:txBody>
+      </p:sp>
+      <p:sp>
+        <p:nvSpPr>
+          <p:cNvPr id="5" name="TextBox 4"/>
+          <p:cNvSpPr txBox="1"/>
+          <p:nvPr/>
+        </p:nvSpPr>
+        <p:spPr>
+          <a:xfrm>
+            <a:off x="640080" y="4494276"/>
+            <a:ext cx="10911535" cy="310896"/>
+          </a:xfrm>
+          <a:prstGeom prst="rect">
+            <a:avLst/>
+          </a:prstGeom>
+          <a:noFill/>
+        </p:spPr>
+        <p:txBody>
+          <a:bodyPr wrap="square">
+            <a:spAutoFit/>
+          </a:bodyPr>
+          <a:lstStyle/>
+          <a:p>
+            <a:pPr algn="ctr"/>
+            <a:r>
+              <a:rPr sz="2000" b="0" i="0">
+                <a:solidFill>
+                  <a:srgbClr val="828282"/>
+                </a:solidFill>
+                <a:latin typeface="Arial"/>
+              </a:rPr>
+              <a:t>聖なるかな、聖なるかな、聖なるかな！</a:t>
+            </a:r>
+          </a:p>
+        </p:txBody>
+      </p:sp>
     </p:spTree>
   </p:cSld>
   <p:clrMapOvr>
@@ -3418,6 +3488,76 @@
           </a:p>
         </p:txBody>
       </p:sp>
+      <p:sp>
+        <p:nvSpPr>
+          <p:cNvPr id="4" name="TextBox 3"/>
+          <p:cNvSpPr txBox="1"/>
+          <p:nvPr/>
+        </p:nvSpPr>
+        <p:spPr>
+          <a:xfrm>
+            <a:off x="640080" y="4128516"/>
+            <a:ext cx="10911535" cy="310896"/>
+          </a:xfrm>
+          <a:prstGeom prst="rect">
+            <a:avLst/>
+          </a:prstGeom>
+          <a:noFill/>
+        </p:spPr>
+        <p:txBody>
+          <a:bodyPr wrap="square">
+            <a:spAutoFit/>
+          </a:bodyPr>
+          <a:lstStyle/>
+          <a:p>
+            <a:pPr algn="ctr"/>
+            <a:r>
+              <a:rPr sz="2000" b="0" i="0">
+                <a:solidFill>
+                  <a:srgbClr val="828282"/>
+                </a:solidFill>
+                <a:latin typeface="Arial"/>
+              </a:rPr>
+              <a:t>全能なる主なる神よ！</a:t>
+            </a:r>
+          </a:p>
+        </p:txBody>
+      </p:sp>
+      <p:sp>
+        <p:nvSpPr>
+          <p:cNvPr id="5" name="TextBox 4"/>
+          <p:cNvSpPr txBox="1"/>
+          <p:nvPr/>
+        </p:nvSpPr>
+        <p:spPr>
+          <a:xfrm>
+            <a:off x="640080" y="4494276"/>
+            <a:ext cx="10911535" cy="310896"/>
+          </a:xfrm>
+          <a:prstGeom prst="rect">
+            <a:avLst/>
+          </a:prstGeom>
+          <a:noFill/>
+        </p:spPr>
+        <p:txBody>
+          <a:bodyPr wrap="square">
+            <a:spAutoFit/>
+          </a:bodyPr>
+          <a:lstStyle/>
+          <a:p>
+            <a:pPr algn="ctr"/>
+            <a:r>
+              <a:rPr sz="2000" b="0" i="0">
+                <a:solidFill>
+                  <a:srgbClr val="828282"/>
+                </a:solidFill>
+                <a:latin typeface="Arial"/>
+              </a:rPr>
+              <a:t>朝早く</a:t>
+            </a:r>
+          </a:p>
+        </p:txBody>
+      </p:sp>
     </p:spTree>
   </p:cSld>
   <p:clrMapOvr>
@@ -3514,6 +3654,76 @@
           </a:p>
         </p:txBody>
       </p:sp>
+      <p:sp>
+        <p:nvSpPr>
+          <p:cNvPr id="4" name="TextBox 3"/>
+          <p:cNvSpPr txBox="1"/>
+          <p:nvPr/>
+        </p:nvSpPr>
+        <p:spPr>
+          <a:xfrm>
+            <a:off x="640080" y="4128516"/>
+            <a:ext cx="10911535" cy="310896"/>
+          </a:xfrm>
+          <a:prstGeom prst="rect">
+            <a:avLst/>
+          </a:prstGeom>
+          <a:noFill/>
+        </p:spPr>
+        <p:txBody>
+          <a:bodyPr wrap="square">
+            <a:spAutoFit/>
+          </a:bodyPr>
+          <a:lstStyle/>
+          <a:p>
+            <a:pPr algn="ctr"/>
+            <a:r>
+              <a:rPr sz="2000" b="0" i="0">
+                <a:solidFill>
+                  <a:srgbClr val="828282"/>
+                </a:solidFill>
+                <a:latin typeface="Arial"/>
+              </a:rPr>
+              <a:t>私たちの歌はあなたへ響き渡ります；</a:t>
+            </a:r>
+          </a:p>
+        </p:txBody>
+      </p:sp>
+      <p:sp>
+        <p:nvSpPr>
+          <p:cNvPr id="5" name="TextBox 4"/>
+          <p:cNvSpPr txBox="1"/>
+          <p:nvPr/>
+        </p:nvSpPr>
+        <p:spPr>
+          <a:xfrm>
+            <a:off x="640080" y="4494276"/>
+            <a:ext cx="10911535" cy="310896"/>
+          </a:xfrm>
+          <a:prstGeom prst="rect">
+            <a:avLst/>
+          </a:prstGeom>
+          <a:noFill/>
+        </p:spPr>
+        <p:txBody>
+          <a:bodyPr wrap="square">
+            <a:spAutoFit/>
+          </a:bodyPr>
+          <a:lstStyle/>
+          <a:p>
+            <a:pPr algn="ctr"/>
+            <a:r>
+              <a:rPr sz="2000" b="0" i="0">
+                <a:solidFill>
+                  <a:srgbClr val="828282"/>
+                </a:solidFill>
+                <a:latin typeface="Arial"/>
+              </a:rPr>
+              <a:t>聖なるかな、聖なるかな、聖なるかな！</a:t>
+            </a:r>
+          </a:p>
+        </p:txBody>
+      </p:sp>
     </p:spTree>
   </p:cSld>
   <p:clrMapOvr>
@@ -3575,6 +3785,41 @@
           </a:p>
         </p:txBody>
       </p:sp>
+      <p:sp>
+        <p:nvSpPr>
+          <p:cNvPr id="3" name="TextBox 2"/>
+          <p:cNvSpPr txBox="1"/>
+          <p:nvPr/>
+        </p:nvSpPr>
+        <p:spPr>
+          <a:xfrm>
+            <a:off x="640080" y="3845052"/>
+            <a:ext cx="10911535" cy="310896"/>
+          </a:xfrm>
+          <a:prstGeom prst="rect">
+            <a:avLst/>
+          </a:prstGeom>
+          <a:noFill/>
+        </p:spPr>
+        <p:txBody>
+          <a:bodyPr wrap="square">
+            <a:spAutoFit/>
+          </a:bodyPr>
+          <a:lstStyle/>
+          <a:p>
+            <a:pPr algn="ctr"/>
+            <a:r>
+              <a:rPr sz="2000" b="0" i="0">
+                <a:solidFill>
+                  <a:srgbClr val="828282"/>
+                </a:solidFill>
+                <a:latin typeface="Arial"/>
+              </a:rPr>
+              <a:t>慈悲深く全能なる神よ！</a:t>
+            </a:r>
+          </a:p>
+        </p:txBody>
+      </p:sp>
     </p:spTree>
   </p:cSld>
   <p:clrMapOvr>
@@ -3767,6 +4012,41 @@
           </a:p>
         </p:txBody>
       </p:sp>
+      <p:sp>
+        <p:nvSpPr>
+          <p:cNvPr id="3" name="TextBox 2"/>
+          <p:cNvSpPr txBox="1"/>
+          <p:nvPr/>
+        </p:nvSpPr>
+        <p:spPr>
+          <a:xfrm>
+            <a:off x="640080" y="3845052"/>
+            <a:ext cx="10911535" cy="310896"/>
+          </a:xfrm>
+          <a:prstGeom prst="rect">
+            <a:avLst/>
+          </a:prstGeom>
+          <a:noFill/>
+        </p:spPr>
+        <p:txBody>
+          <a:bodyPr wrap="square">
+            <a:spAutoFit/>
+          </a:bodyPr>
+          <a:lstStyle/>
+          <a:p>
+            <a:pPr algn="ctr"/>
+            <a:r>
+              <a:rPr sz="2000" b="0" i="0">
+                <a:solidFill>
+                  <a:srgbClr val="828282"/>
+                </a:solidFill>
+                <a:latin typeface="Arial"/>
+              </a:rPr>
+              <a:t>三つの位格の神</a:t>
+            </a:r>
+          </a:p>
+        </p:txBody>
+      </p:sp>
     </p:spTree>
   </p:cSld>
   <p:clrMapOvr>
@@ -3959,6 +4239,41 @@
           </a:p>
         </p:txBody>
       </p:sp>
+      <p:sp>
+        <p:nvSpPr>
+          <p:cNvPr id="3" name="TextBox 2"/>
+          <p:cNvSpPr txBox="1"/>
+          <p:nvPr/>
+        </p:nvSpPr>
+        <p:spPr>
+          <a:xfrm>
+            <a:off x="640080" y="3845052"/>
+            <a:ext cx="10911535" cy="310896"/>
+          </a:xfrm>
+          <a:prstGeom prst="rect">
+            <a:avLst/>
+          </a:prstGeom>
+          <a:noFill/>
+        </p:spPr>
+        <p:txBody>
+          <a:bodyPr wrap="square">
+            <a:spAutoFit/>
+          </a:bodyPr>
+          <a:lstStyle/>
+          <a:p>
+            <a:pPr algn="ctr"/>
+            <a:r>
+              <a:rPr sz="2000" b="0" i="0">
+                <a:solidFill>
+                  <a:srgbClr val="828282"/>
+                </a:solidFill>
+                <a:latin typeface="Arial"/>
+              </a:rPr>
+              <a:t>祝福された三位一体よ！</a:t>
+            </a:r>
+          </a:p>
+        </p:txBody>
+      </p:sp>
     </p:spTree>
   </p:cSld>
   <p:clrMapOvr>
@@ -4151,6 +4466,41 @@
           </a:p>
         </p:txBody>
       </p:sp>
+      <p:sp>
+        <p:nvSpPr>
+          <p:cNvPr id="3" name="TextBox 2"/>
+          <p:cNvSpPr txBox="1"/>
+          <p:nvPr/>
+        </p:nvSpPr>
+        <p:spPr>
+          <a:xfrm>
+            <a:off x="640080" y="3845052"/>
+            <a:ext cx="10911535" cy="310896"/>
+          </a:xfrm>
+          <a:prstGeom prst="rect">
+            <a:avLst/>
+          </a:prstGeom>
+          <a:noFill/>
+        </p:spPr>
+        <p:txBody>
+          <a:bodyPr wrap="square">
+            <a:spAutoFit/>
+          </a:bodyPr>
+          <a:lstStyle/>
+          <a:p>
+            <a:pPr algn="ctr"/>
+            <a:r>
+              <a:rPr sz="2000" b="0" i="0">
+                <a:solidFill>
+                  <a:srgbClr val="828282"/>
+                </a:solidFill>
+                <a:latin typeface="Arial"/>
+              </a:rPr>
+              <a:t>聖なるかな、聖なるかな、聖なるかな！</a:t>
+            </a:r>
+          </a:p>
+        </p:txBody>
+      </p:sp>
     </p:spTree>
   </p:cSld>
   <p:clrMapOvr>
@@ -4212,6 +4562,41 @@
           </a:p>
         </p:txBody>
       </p:sp>
+      <p:sp>
+        <p:nvSpPr>
+          <p:cNvPr id="3" name="TextBox 2"/>
+          <p:cNvSpPr txBox="1"/>
+          <p:nvPr/>
+        </p:nvSpPr>
+        <p:spPr>
+          <a:xfrm>
+            <a:off x="640080" y="3845052"/>
+            <a:ext cx="10911535" cy="310896"/>
+          </a:xfrm>
+          <a:prstGeom prst="rect">
+            <a:avLst/>
+          </a:prstGeom>
+          <a:noFill/>
+        </p:spPr>
+        <p:txBody>
+          <a:bodyPr wrap="square">
+            <a:spAutoFit/>
+          </a:bodyPr>
+          <a:lstStyle/>
+          <a:p>
+            <a:pPr algn="ctr"/>
+            <a:r>
+              <a:rPr sz="2000" b="0" i="0">
+                <a:solidFill>
+                  <a:srgbClr val="828282"/>
+                </a:solidFill>
+                <a:latin typeface="Arial"/>
+              </a:rPr>
+              <a:t>全能なる主なる神よ！</a:t>
+            </a:r>
+          </a:p>
+        </p:txBody>
+      </p:sp>
     </p:spTree>
   </p:cSld>
   <p:clrMapOvr>
@@ -4439,6 +4824,41 @@
           </a:p>
         </p:txBody>
       </p:sp>
+      <p:sp>
+        <p:nvSpPr>
+          <p:cNvPr id="4" name="TextBox 3"/>
+          <p:cNvSpPr txBox="1"/>
+          <p:nvPr/>
+        </p:nvSpPr>
+        <p:spPr>
+          <a:xfrm>
+            <a:off x="640080" y="4128516"/>
+            <a:ext cx="10911535" cy="310896"/>
+          </a:xfrm>
+          <a:prstGeom prst="rect">
+            <a:avLst/>
+          </a:prstGeom>
+          <a:noFill/>
+        </p:spPr>
+        <p:txBody>
+          <a:bodyPr wrap="square">
+            <a:spAutoFit/>
+          </a:bodyPr>
+          <a:lstStyle/>
+          <a:p>
+            <a:pPr algn="ctr"/>
+            <a:r>
+              <a:rPr sz="2000" b="0" i="0">
+                <a:solidFill>
+                  <a:srgbClr val="828282"/>
+                </a:solidFill>
+                <a:latin typeface="Arial"/>
+              </a:rPr>
+              <a:t>あなたのすべての業は賛美するでしょう</a:t>
+            </a:r>
+          </a:p>
+        </p:txBody>
+      </p:sp>
     </p:spTree>
   </p:cSld>
   <p:clrMapOvr>
@@ -5111,6 +5531,41 @@
           </a:p>
         </p:txBody>
       </p:sp>
+      <p:sp>
+        <p:nvSpPr>
+          <p:cNvPr id="3" name="TextBox 2"/>
+          <p:cNvSpPr txBox="1"/>
+          <p:nvPr/>
+        </p:nvSpPr>
+        <p:spPr>
+          <a:xfrm>
+            <a:off x="640080" y="3845052"/>
+            <a:ext cx="10911535" cy="310896"/>
+          </a:xfrm>
+          <a:prstGeom prst="rect">
+            <a:avLst/>
+          </a:prstGeom>
+          <a:noFill/>
+        </p:spPr>
+        <p:txBody>
+          <a:bodyPr wrap="square">
+            <a:spAutoFit/>
+          </a:bodyPr>
+          <a:lstStyle/>
+          <a:p>
+            <a:pPr algn="ctr"/>
+            <a:r>
+              <a:rPr sz="2000" b="0" i="0">
+                <a:solidFill>
+                  <a:srgbClr val="828282"/>
+                </a:solidFill>
+                <a:latin typeface="Arial"/>
+              </a:rPr>
+              <a:t>朝早く</a:t>
+            </a:r>
+          </a:p>
+        </p:txBody>
+      </p:sp>
     </p:spTree>
   </p:cSld>
   <p:clrMapOvr>
@@ -5303,6 +5758,41 @@
           </a:p>
         </p:txBody>
       </p:sp>
+      <p:sp>
+        <p:nvSpPr>
+          <p:cNvPr id="3" name="TextBox 2"/>
+          <p:cNvSpPr txBox="1"/>
+          <p:nvPr/>
+        </p:nvSpPr>
+        <p:spPr>
+          <a:xfrm>
+            <a:off x="640080" y="3845052"/>
+            <a:ext cx="10911535" cy="310896"/>
+          </a:xfrm>
+          <a:prstGeom prst="rect">
+            <a:avLst/>
+          </a:prstGeom>
+          <a:noFill/>
+        </p:spPr>
+        <p:txBody>
+          <a:bodyPr wrap="square">
+            <a:spAutoFit/>
+          </a:bodyPr>
+          <a:lstStyle/>
+          <a:p>
+            <a:pPr algn="ctr"/>
+            <a:r>
+              <a:rPr sz="2000" b="0" i="0">
+                <a:solidFill>
+                  <a:srgbClr val="828282"/>
+                </a:solidFill>
+                <a:latin typeface="Arial"/>
+              </a:rPr>
+              <a:t>私たちの歌はあなたへ響き渡ります；</a:t>
+            </a:r>
+          </a:p>
+        </p:txBody>
+      </p:sp>
     </p:spTree>
   </p:cSld>
   <p:clrMapOvr>
@@ -5530,6 +6020,76 @@
           </a:p>
         </p:txBody>
       </p:sp>
+      <p:sp>
+        <p:nvSpPr>
+          <p:cNvPr id="4" name="TextBox 3"/>
+          <p:cNvSpPr txBox="1"/>
+          <p:nvPr/>
+        </p:nvSpPr>
+        <p:spPr>
+          <a:xfrm>
+            <a:off x="640080" y="4128516"/>
+            <a:ext cx="10911535" cy="310896"/>
+          </a:xfrm>
+          <a:prstGeom prst="rect">
+            <a:avLst/>
+          </a:prstGeom>
+          <a:noFill/>
+        </p:spPr>
+        <p:txBody>
+          <a:bodyPr wrap="square">
+            <a:spAutoFit/>
+          </a:bodyPr>
+          <a:lstStyle/>
+          <a:p>
+            <a:pPr algn="ctr"/>
+            <a:r>
+              <a:rPr sz="2000" b="0" i="0">
+                <a:solidFill>
+                  <a:srgbClr val="828282"/>
+                </a:solidFill>
+                <a:latin typeface="Arial"/>
+              </a:rPr>
+              <a:t>聖なるかな、聖なるかな、聖なるかな！</a:t>
+            </a:r>
+          </a:p>
+        </p:txBody>
+      </p:sp>
+      <p:sp>
+        <p:nvSpPr>
+          <p:cNvPr id="5" name="TextBox 4"/>
+          <p:cNvSpPr txBox="1"/>
+          <p:nvPr/>
+        </p:nvSpPr>
+        <p:spPr>
+          <a:xfrm>
+            <a:off x="640080" y="4494276"/>
+            <a:ext cx="10911535" cy="310896"/>
+          </a:xfrm>
+          <a:prstGeom prst="rect">
+            <a:avLst/>
+          </a:prstGeom>
+          <a:noFill/>
+        </p:spPr>
+        <p:txBody>
+          <a:bodyPr wrap="square">
+            <a:spAutoFit/>
+          </a:bodyPr>
+          <a:lstStyle/>
+          <a:p>
+            <a:pPr algn="ctr"/>
+            <a:r>
+              <a:rPr sz="2000" b="0" i="0">
+                <a:solidFill>
+                  <a:srgbClr val="828282"/>
+                </a:solidFill>
+                <a:latin typeface="Arial"/>
+              </a:rPr>
+              <a:t>慈悲深く全能なる神よ！</a:t>
+            </a:r>
+          </a:p>
+        </p:txBody>
+      </p:sp>
     </p:spTree>
   </p:cSld>
   <p:clrMapOvr>
@@ -5622,6 +6182,76 @@
                 <a:latin typeface="Arial"/>
               </a:rPr>
               <a:t>Benedita Trindade!</a:t>
+            </a:r>
+          </a:p>
+        </p:txBody>
+      </p:sp>
+      <p:sp>
+        <p:nvSpPr>
+          <p:cNvPr id="4" name="TextBox 3"/>
+          <p:cNvSpPr txBox="1"/>
+          <p:nvPr/>
+        </p:nvSpPr>
+        <p:spPr>
+          <a:xfrm>
+            <a:off x="640080" y="4128516"/>
+            <a:ext cx="10911535" cy="310896"/>
+          </a:xfrm>
+          <a:prstGeom prst="rect">
+            <a:avLst/>
+          </a:prstGeom>
+          <a:noFill/>
+        </p:spPr>
+        <p:txBody>
+          <a:bodyPr wrap="square">
+            <a:spAutoFit/>
+          </a:bodyPr>
+          <a:lstStyle/>
+          <a:p>
+            <a:pPr algn="ctr"/>
+            <a:r>
+              <a:rPr sz="2000" b="0" i="0">
+                <a:solidFill>
+                  <a:srgbClr val="828282"/>
+                </a:solidFill>
+                <a:latin typeface="Arial"/>
+              </a:rPr>
+              <a:t>三つの位格の神</a:t>
+            </a:r>
+          </a:p>
+        </p:txBody>
+      </p:sp>
+      <p:sp>
+        <p:nvSpPr>
+          <p:cNvPr id="5" name="TextBox 4"/>
+          <p:cNvSpPr txBox="1"/>
+          <p:nvPr/>
+        </p:nvSpPr>
+        <p:spPr>
+          <a:xfrm>
+            <a:off x="640080" y="4494276"/>
+            <a:ext cx="10911535" cy="310896"/>
+          </a:xfrm>
+          <a:prstGeom prst="rect">
+            <a:avLst/>
+          </a:prstGeom>
+          <a:noFill/>
+        </p:spPr>
+        <p:txBody>
+          <a:bodyPr wrap="square">
+            <a:spAutoFit/>
+          </a:bodyPr>
+          <a:lstStyle/>
+          <a:p>
+            <a:pPr algn="ctr"/>
+            <a:r>
+              <a:rPr sz="2000" b="0" i="0">
+                <a:solidFill>
+                  <a:srgbClr val="828282"/>
+                </a:solidFill>
+                <a:latin typeface="Arial"/>
+              </a:rPr>
+              <a:t>祝福された三位一体よ！</a:t>
             </a:r>
           </a:p>
         </p:txBody>
